--- a/blank-target.pptx
+++ b/blank-target.pptx
@@ -1,17 +1,16 @@
 
 <file path=ppt/presentation.xml><?xml version="1.0" encoding="utf-8"?>
-<p:presentation xmlns:a="http://schemas.openxmlformats.org/drawingml/2006/main" xmlns:r="http://schemas.openxmlformats.org/officeDocument/2006/relationships" xmlns:p="http://schemas.openxmlformats.org/presentationml/2006/main" saveSubsetFonts="1" autoCompressPictures="0">
+<p:presentation xmlns:a="http://schemas.openxmlformats.org/drawingml/2006/main" xmlns:r="http://schemas.openxmlformats.org/officeDocument/2006/relationships" xmlns:p="http://schemas.openxmlformats.org/presentationml/2006/main" saveSubsetFonts="1">
   <p:sldMasterIdLst>
     <p:sldMasterId id="2147483648" r:id="rId1"/>
   </p:sldMasterIdLst>
-  <p:sldIdLst/>
   <p:sldSz cx="12192000" cy="6858000"/>
   <p:notesSz cx="6858000" cy="9144000"/>
   <p:defaultTextStyle>
     <a:defPPr>
       <a:defRPr lang="en-US"/>
     </a:defPPr>
-    <a:lvl1pPr marL="0" algn="l" defTabSz="457200" rtl="0" eaLnBrk="1" latinLnBrk="0" hangingPunct="1">
+    <a:lvl1pPr marL="0" algn="l" defTabSz="914400" rtl="0" eaLnBrk="1" latinLnBrk="0" hangingPunct="1">
       <a:defRPr sz="1800" kern="1200">
         <a:solidFill>
           <a:schemeClr val="tx1"/>
@@ -21,7 +20,7 @@
         <a:cs typeface="+mn-cs"/>
       </a:defRPr>
     </a:lvl1pPr>
-    <a:lvl2pPr marL="457200" algn="l" defTabSz="457200" rtl="0" eaLnBrk="1" latinLnBrk="0" hangingPunct="1">
+    <a:lvl2pPr marL="457200" algn="l" defTabSz="914400" rtl="0" eaLnBrk="1" latinLnBrk="0" hangingPunct="1">
       <a:defRPr sz="1800" kern="1200">
         <a:solidFill>
           <a:schemeClr val="tx1"/>
@@ -31,7 +30,7 @@
         <a:cs typeface="+mn-cs"/>
       </a:defRPr>
     </a:lvl2pPr>
-    <a:lvl3pPr marL="914400" algn="l" defTabSz="457200" rtl="0" eaLnBrk="1" latinLnBrk="0" hangingPunct="1">
+    <a:lvl3pPr marL="914400" algn="l" defTabSz="914400" rtl="0" eaLnBrk="1" latinLnBrk="0" hangingPunct="1">
       <a:defRPr sz="1800" kern="1200">
         <a:solidFill>
           <a:schemeClr val="tx1"/>
@@ -41,7 +40,7 @@
         <a:cs typeface="+mn-cs"/>
       </a:defRPr>
     </a:lvl3pPr>
-    <a:lvl4pPr marL="1371600" algn="l" defTabSz="457200" rtl="0" eaLnBrk="1" latinLnBrk="0" hangingPunct="1">
+    <a:lvl4pPr marL="1371600" algn="l" defTabSz="914400" rtl="0" eaLnBrk="1" latinLnBrk="0" hangingPunct="1">
       <a:defRPr sz="1800" kern="1200">
         <a:solidFill>
           <a:schemeClr val="tx1"/>
@@ -51,7 +50,7 @@
         <a:cs typeface="+mn-cs"/>
       </a:defRPr>
     </a:lvl4pPr>
-    <a:lvl5pPr marL="1828800" algn="l" defTabSz="457200" rtl="0" eaLnBrk="1" latinLnBrk="0" hangingPunct="1">
+    <a:lvl5pPr marL="1828800" algn="l" defTabSz="914400" rtl="0" eaLnBrk="1" latinLnBrk="0" hangingPunct="1">
       <a:defRPr sz="1800" kern="1200">
         <a:solidFill>
           <a:schemeClr val="tx1"/>
@@ -61,7 +60,7 @@
         <a:cs typeface="+mn-cs"/>
       </a:defRPr>
     </a:lvl5pPr>
-    <a:lvl6pPr marL="2286000" algn="l" defTabSz="457200" rtl="0" eaLnBrk="1" latinLnBrk="0" hangingPunct="1">
+    <a:lvl6pPr marL="2286000" algn="l" defTabSz="914400" rtl="0" eaLnBrk="1" latinLnBrk="0" hangingPunct="1">
       <a:defRPr sz="1800" kern="1200">
         <a:solidFill>
           <a:schemeClr val="tx1"/>
@@ -71,7 +70,7 @@
         <a:cs typeface="+mn-cs"/>
       </a:defRPr>
     </a:lvl6pPr>
-    <a:lvl7pPr marL="2743200" algn="l" defTabSz="457200" rtl="0" eaLnBrk="1" latinLnBrk="0" hangingPunct="1">
+    <a:lvl7pPr marL="2743200" algn="l" defTabSz="914400" rtl="0" eaLnBrk="1" latinLnBrk="0" hangingPunct="1">
       <a:defRPr sz="1800" kern="1200">
         <a:solidFill>
           <a:schemeClr val="tx1"/>
@@ -81,7 +80,7 @@
         <a:cs typeface="+mn-cs"/>
       </a:defRPr>
     </a:lvl7pPr>
-    <a:lvl8pPr marL="3200400" algn="l" defTabSz="457200" rtl="0" eaLnBrk="1" latinLnBrk="0" hangingPunct="1">
+    <a:lvl8pPr marL="3200400" algn="l" defTabSz="914400" rtl="0" eaLnBrk="1" latinLnBrk="0" hangingPunct="1">
       <a:defRPr sz="1800" kern="1200">
         <a:solidFill>
           <a:schemeClr val="tx1"/>
@@ -91,7 +90,7 @@
         <a:cs typeface="+mn-cs"/>
       </a:defRPr>
     </a:lvl8pPr>
-    <a:lvl9pPr marL="3657600" algn="l" defTabSz="457200" rtl="0" eaLnBrk="1" latinLnBrk="0" hangingPunct="1">
+    <a:lvl9pPr marL="3657600" algn="l" defTabSz="914400" rtl="0" eaLnBrk="1" latinLnBrk="0" hangingPunct="1">
       <a:defRPr sz="1800" kern="1200">
         <a:solidFill>
           <a:schemeClr val="tx1"/>
@@ -124,7 +123,13 @@
       </p:grpSpPr>
       <p:sp>
         <p:nvSpPr>
-          <p:cNvPr id="2" name="Title 1"/>
+          <p:cNvPr id="2" name="Title 1">
+            <a:extLst>
+              <a:ext uri="{FF2B5EF4-FFF2-40B4-BE49-F238E27FC236}">
+                <a16:creationId xmlns:a16="http://schemas.microsoft.com/office/drawing/2014/main" id="{7E743760-7B5D-8DB7-521F-A3B0C6B56C1F}"/>
+              </a:ext>
+            </a:extLst>
+          </p:cNvPr>
           <p:cNvSpPr>
             <a:spLocks noGrp="1"/>
           </p:cNvSpPr>
@@ -134,25 +139,34 @@
         </p:nvSpPr>
         <p:spPr>
           <a:xfrm>
-            <a:off x="685800" y="2130425"/>
-            <a:ext cx="7772400" cy="1470025"/>
+            <a:off x="1524000" y="1122363"/>
+            <a:ext cx="9144000" cy="2387600"/>
           </a:xfrm>
         </p:spPr>
         <p:txBody>
-          <a:bodyPr/>
-          <a:lstStyle/>
-          <a:p>
-            <a:r>
-              <a:rPr lang="en-US" smtClean="0"/>
+          <a:bodyPr anchor="b"/>
+          <a:lstStyle>
+            <a:lvl1pPr algn="ctr">
+              <a:defRPr sz="6000"/>
+            </a:lvl1pPr>
+          </a:lstStyle>
+          <a:p>
+            <a:r>
+              <a:rPr lang="en-US"/>
               <a:t>Click to edit Master title style</a:t>
             </a:r>
-            <a:endParaRPr lang="en-US"/>
-          </a:p>
-        </p:txBody>
-      </p:sp>
-      <p:sp>
-        <p:nvSpPr>
-          <p:cNvPr id="3" name="Subtitle 2"/>
+          </a:p>
+        </p:txBody>
+      </p:sp>
+      <p:sp>
+        <p:nvSpPr>
+          <p:cNvPr id="3" name="Subtitle 2">
+            <a:extLst>
+              <a:ext uri="{FF2B5EF4-FFF2-40B4-BE49-F238E27FC236}">
+                <a16:creationId xmlns:a16="http://schemas.microsoft.com/office/drawing/2014/main" id="{FCC8F0EC-51A4-6FE0-4454-6068FFE37F94}"/>
+              </a:ext>
+            </a:extLst>
+          </p:cNvPr>
           <p:cNvSpPr>
             <a:spLocks noGrp="1"/>
           </p:cNvSpPr>
@@ -162,8 +176,8 @@
         </p:nvSpPr>
         <p:spPr>
           <a:xfrm>
-            <a:off x="1371600" y="3886200"/>
-            <a:ext cx="6400800" cy="1752600"/>
+            <a:off x="1524000" y="3602038"/>
+            <a:ext cx="9144000" cy="1655762"/>
           </a:xfrm>
         </p:spPr>
         <p:txBody>
@@ -171,122 +185,73 @@
           <a:lstStyle>
             <a:lvl1pPr marL="0" indent="0" algn="ctr">
               <a:buNone/>
-              <a:defRPr>
-                <a:solidFill>
-                  <a:schemeClr val="tx1">
-                    <a:tint val="75000"/>
-                  </a:schemeClr>
-                </a:solidFill>
-              </a:defRPr>
+              <a:defRPr sz="2400"/>
             </a:lvl1pPr>
             <a:lvl2pPr marL="457200" indent="0" algn="ctr">
               <a:buNone/>
-              <a:defRPr>
-                <a:solidFill>
-                  <a:schemeClr val="tx1">
-                    <a:tint val="75000"/>
-                  </a:schemeClr>
-                </a:solidFill>
-              </a:defRPr>
+              <a:defRPr sz="2000"/>
             </a:lvl2pPr>
             <a:lvl3pPr marL="914400" indent="0" algn="ctr">
               <a:buNone/>
-              <a:defRPr>
-                <a:solidFill>
-                  <a:schemeClr val="tx1">
-                    <a:tint val="75000"/>
-                  </a:schemeClr>
-                </a:solidFill>
-              </a:defRPr>
+              <a:defRPr sz="1800"/>
             </a:lvl3pPr>
             <a:lvl4pPr marL="1371600" indent="0" algn="ctr">
               <a:buNone/>
-              <a:defRPr>
-                <a:solidFill>
-                  <a:schemeClr val="tx1">
-                    <a:tint val="75000"/>
-                  </a:schemeClr>
-                </a:solidFill>
-              </a:defRPr>
+              <a:defRPr sz="1600"/>
             </a:lvl4pPr>
             <a:lvl5pPr marL="1828800" indent="0" algn="ctr">
               <a:buNone/>
-              <a:defRPr>
-                <a:solidFill>
-                  <a:schemeClr val="tx1">
-                    <a:tint val="75000"/>
-                  </a:schemeClr>
-                </a:solidFill>
-              </a:defRPr>
+              <a:defRPr sz="1600"/>
             </a:lvl5pPr>
             <a:lvl6pPr marL="2286000" indent="0" algn="ctr">
               <a:buNone/>
-              <a:defRPr>
-                <a:solidFill>
-                  <a:schemeClr val="tx1">
-                    <a:tint val="75000"/>
-                  </a:schemeClr>
-                </a:solidFill>
-              </a:defRPr>
+              <a:defRPr sz="1600"/>
             </a:lvl6pPr>
             <a:lvl7pPr marL="2743200" indent="0" algn="ctr">
               <a:buNone/>
-              <a:defRPr>
-                <a:solidFill>
-                  <a:schemeClr val="tx1">
-                    <a:tint val="75000"/>
-                  </a:schemeClr>
-                </a:solidFill>
-              </a:defRPr>
+              <a:defRPr sz="1600"/>
             </a:lvl7pPr>
             <a:lvl8pPr marL="3200400" indent="0" algn="ctr">
               <a:buNone/>
-              <a:defRPr>
-                <a:solidFill>
-                  <a:schemeClr val="tx1">
-                    <a:tint val="75000"/>
-                  </a:schemeClr>
-                </a:solidFill>
-              </a:defRPr>
+              <a:defRPr sz="1600"/>
             </a:lvl8pPr>
             <a:lvl9pPr marL="3657600" indent="0" algn="ctr">
               <a:buNone/>
-              <a:defRPr>
-                <a:solidFill>
-                  <a:schemeClr val="tx1">
-                    <a:tint val="75000"/>
-                  </a:schemeClr>
-                </a:solidFill>
-              </a:defRPr>
+              <a:defRPr sz="1600"/>
             </a:lvl9pPr>
           </a:lstStyle>
           <a:p>
             <a:r>
+              <a:rPr lang="en-US"/>
+              <a:t>Click to edit Master subtitle style</a:t>
+            </a:r>
+          </a:p>
+        </p:txBody>
+      </p:sp>
+      <p:sp>
+        <p:nvSpPr>
+          <p:cNvPr id="4" name="Date Placeholder 3">
+            <a:extLst>
+              <a:ext uri="{FF2B5EF4-FFF2-40B4-BE49-F238E27FC236}">
+                <a16:creationId xmlns:a16="http://schemas.microsoft.com/office/drawing/2014/main" id="{DCB8C731-7641-5820-1044-707EA5D3CBE8}"/>
+              </a:ext>
+            </a:extLst>
+          </p:cNvPr>
+          <p:cNvSpPr>
+            <a:spLocks noGrp="1"/>
+          </p:cNvSpPr>
+          <p:nvPr>
+            <p:ph type="dt" sz="half" idx="10"/>
+          </p:nvPr>
+        </p:nvSpPr>
+        <p:spPr/>
+        <p:txBody>
+          <a:bodyPr/>
+          <a:lstStyle/>
+          <a:p>
+            <a:fld id="{74017AE6-BB44-43EC-A7A9-B4B79CC7F5BB}" type="datetimeFigureOut">
               <a:rPr lang="en-US" smtClean="0"/>
-              <a:t>Click to edit Master subtitle style</a:t>
-            </a:r>
-            <a:endParaRPr lang="en-US"/>
-          </a:p>
-        </p:txBody>
-      </p:sp>
-      <p:sp>
-        <p:nvSpPr>
-          <p:cNvPr id="4" name="Date Placeholder 3"/>
-          <p:cNvSpPr>
-            <a:spLocks noGrp="1"/>
-          </p:cNvSpPr>
-          <p:nvPr>
-            <p:ph type="dt" sz="half" idx="10"/>
-          </p:nvPr>
-        </p:nvSpPr>
-        <p:spPr/>
-        <p:txBody>
-          <a:bodyPr/>
-          <a:lstStyle/>
-          <a:p>
-            <a:fld id="{5BCAD085-E8A6-8845-BD4E-CB4CCA059FC4}" type="datetimeFigureOut">
-              <a:rPr lang="en-US" smtClean="0"/>
-              <a:t>1/27/13</a:t>
+              <a:t>7/18/2026</a:t>
             </a:fld>
             <a:endParaRPr lang="en-US"/>
           </a:p>
@@ -294,7 +259,13 @@
       </p:sp>
       <p:sp>
         <p:nvSpPr>
-          <p:cNvPr id="5" name="Footer Placeholder 4"/>
+          <p:cNvPr id="5" name="Footer Placeholder 4">
+            <a:extLst>
+              <a:ext uri="{FF2B5EF4-FFF2-40B4-BE49-F238E27FC236}">
+                <a16:creationId xmlns:a16="http://schemas.microsoft.com/office/drawing/2014/main" id="{3F4A03D5-5C75-8CA4-6AE0-4C2FF3713A1E}"/>
+              </a:ext>
+            </a:extLst>
+          </p:cNvPr>
           <p:cNvSpPr>
             <a:spLocks noGrp="1"/>
           </p:cNvSpPr>
@@ -313,7 +284,13 @@
       </p:sp>
       <p:sp>
         <p:nvSpPr>
-          <p:cNvPr id="6" name="Slide Number Placeholder 5"/>
+          <p:cNvPr id="6" name="Slide Number Placeholder 5">
+            <a:extLst>
+              <a:ext uri="{FF2B5EF4-FFF2-40B4-BE49-F238E27FC236}">
+                <a16:creationId xmlns:a16="http://schemas.microsoft.com/office/drawing/2014/main" id="{A5000373-E5C1-7BBA-2703-02A1A35F09FF}"/>
+              </a:ext>
+            </a:extLst>
+          </p:cNvPr>
           <p:cNvSpPr>
             <a:spLocks noGrp="1"/>
           </p:cNvSpPr>
@@ -326,7 +303,7 @@
           <a:bodyPr/>
           <a:lstStyle/>
           <a:p>
-            <a:fld id="{C1FF6DA9-008F-8B48-92A6-B652298478BF}" type="slidenum">
+            <a:fld id="{DD65504E-0CE5-4727-AA73-EB6D2F187A51}" type="slidenum">
               <a:rPr lang="en-US" smtClean="0"/>
               <a:t>‹#›</a:t>
             </a:fld>
@@ -337,7 +314,7 @@
     </p:spTree>
     <p:extLst>
       <p:ext uri="{BB962C8B-B14F-4D97-AF65-F5344CB8AC3E}">
-        <p14:creationId xmlns:p14="http://schemas.microsoft.com/office/powerpoint/2010/main" val="3168075583"/>
+        <p14:creationId xmlns:p14="http://schemas.microsoft.com/office/powerpoint/2010/main" val="1052415419"/>
       </p:ext>
     </p:extLst>
   </p:cSld>
@@ -366,7 +343,13 @@
       </p:grpSpPr>
       <p:sp>
         <p:nvSpPr>
-          <p:cNvPr id="2" name="Title 1"/>
+          <p:cNvPr id="2" name="Title 1">
+            <a:extLst>
+              <a:ext uri="{FF2B5EF4-FFF2-40B4-BE49-F238E27FC236}">
+                <a16:creationId xmlns:a16="http://schemas.microsoft.com/office/drawing/2014/main" id="{DF6E5B26-8C51-E41F-FB92-F4D97D239662}"/>
+              </a:ext>
+            </a:extLst>
+          </p:cNvPr>
           <p:cNvSpPr>
             <a:spLocks noGrp="1"/>
           </p:cNvSpPr>
@@ -380,83 +363,93 @@
           <a:lstStyle/>
           <a:p>
             <a:r>
+              <a:rPr lang="en-US"/>
+              <a:t>Click to edit Master title style</a:t>
+            </a:r>
+          </a:p>
+        </p:txBody>
+      </p:sp>
+      <p:sp>
+        <p:nvSpPr>
+          <p:cNvPr id="3" name="Vertical Text Placeholder 2">
+            <a:extLst>
+              <a:ext uri="{FF2B5EF4-FFF2-40B4-BE49-F238E27FC236}">
+                <a16:creationId xmlns:a16="http://schemas.microsoft.com/office/drawing/2014/main" id="{C0792041-D0DB-04C8-17AC-29C4DD0DBBA7}"/>
+              </a:ext>
+            </a:extLst>
+          </p:cNvPr>
+          <p:cNvSpPr>
+            <a:spLocks noGrp="1"/>
+          </p:cNvSpPr>
+          <p:nvPr>
+            <p:ph type="body" orient="vert" idx="1"/>
+          </p:nvPr>
+        </p:nvSpPr>
+        <p:spPr/>
+        <p:txBody>
+          <a:bodyPr vert="eaVert"/>
+          <a:lstStyle/>
+          <a:p>
+            <a:pPr lvl="0"/>
+            <a:r>
+              <a:rPr lang="en-US"/>
+              <a:t>Click to edit Master text styles</a:t>
+            </a:r>
+          </a:p>
+          <a:p>
+            <a:pPr lvl="1"/>
+            <a:r>
+              <a:rPr lang="en-US"/>
+              <a:t>Second level</a:t>
+            </a:r>
+          </a:p>
+          <a:p>
+            <a:pPr lvl="2"/>
+            <a:r>
+              <a:rPr lang="en-US"/>
+              <a:t>Third level</a:t>
+            </a:r>
+          </a:p>
+          <a:p>
+            <a:pPr lvl="3"/>
+            <a:r>
+              <a:rPr lang="en-US"/>
+              <a:t>Fourth level</a:t>
+            </a:r>
+          </a:p>
+          <a:p>
+            <a:pPr lvl="4"/>
+            <a:r>
+              <a:rPr lang="en-US"/>
+              <a:t>Fifth level</a:t>
+            </a:r>
+          </a:p>
+        </p:txBody>
+      </p:sp>
+      <p:sp>
+        <p:nvSpPr>
+          <p:cNvPr id="4" name="Date Placeholder 3">
+            <a:extLst>
+              <a:ext uri="{FF2B5EF4-FFF2-40B4-BE49-F238E27FC236}">
+                <a16:creationId xmlns:a16="http://schemas.microsoft.com/office/drawing/2014/main" id="{84A1938B-6C8B-7F73-F48A-4024ACFCAF4F}"/>
+              </a:ext>
+            </a:extLst>
+          </p:cNvPr>
+          <p:cNvSpPr>
+            <a:spLocks noGrp="1"/>
+          </p:cNvSpPr>
+          <p:nvPr>
+            <p:ph type="dt" sz="half" idx="10"/>
+          </p:nvPr>
+        </p:nvSpPr>
+        <p:spPr/>
+        <p:txBody>
+          <a:bodyPr/>
+          <a:lstStyle/>
+          <a:p>
+            <a:fld id="{74017AE6-BB44-43EC-A7A9-B4B79CC7F5BB}" type="datetimeFigureOut">
               <a:rPr lang="en-US" smtClean="0"/>
-              <a:t>Click to edit Master title style</a:t>
-            </a:r>
-            <a:endParaRPr lang="en-US"/>
-          </a:p>
-        </p:txBody>
-      </p:sp>
-      <p:sp>
-        <p:nvSpPr>
-          <p:cNvPr id="3" name="Vertical Text Placeholder 2"/>
-          <p:cNvSpPr>
-            <a:spLocks noGrp="1"/>
-          </p:cNvSpPr>
-          <p:nvPr>
-            <p:ph type="body" orient="vert" idx="1"/>
-          </p:nvPr>
-        </p:nvSpPr>
-        <p:spPr/>
-        <p:txBody>
-          <a:bodyPr vert="eaVert"/>
-          <a:lstStyle/>
-          <a:p>
-            <a:pPr lvl="0"/>
-            <a:r>
-              <a:rPr lang="en-US" smtClean="0"/>
-              <a:t>Click to edit Master text styles</a:t>
-            </a:r>
-          </a:p>
-          <a:p>
-            <a:pPr lvl="1"/>
-            <a:r>
-              <a:rPr lang="en-US" smtClean="0"/>
-              <a:t>Second level</a:t>
-            </a:r>
-          </a:p>
-          <a:p>
-            <a:pPr lvl="2"/>
-            <a:r>
-              <a:rPr lang="en-US" smtClean="0"/>
-              <a:t>Third level</a:t>
-            </a:r>
-          </a:p>
-          <a:p>
-            <a:pPr lvl="3"/>
-            <a:r>
-              <a:rPr lang="en-US" smtClean="0"/>
-              <a:t>Fourth level</a:t>
-            </a:r>
-          </a:p>
-          <a:p>
-            <a:pPr lvl="4"/>
-            <a:r>
-              <a:rPr lang="en-US" smtClean="0"/>
-              <a:t>Fifth level</a:t>
-            </a:r>
-            <a:endParaRPr lang="en-US"/>
-          </a:p>
-        </p:txBody>
-      </p:sp>
-      <p:sp>
-        <p:nvSpPr>
-          <p:cNvPr id="4" name="Date Placeholder 3"/>
-          <p:cNvSpPr>
-            <a:spLocks noGrp="1"/>
-          </p:cNvSpPr>
-          <p:nvPr>
-            <p:ph type="dt" sz="half" idx="10"/>
-          </p:nvPr>
-        </p:nvSpPr>
-        <p:spPr/>
-        <p:txBody>
-          <a:bodyPr/>
-          <a:lstStyle/>
-          <a:p>
-            <a:fld id="{5BCAD085-E8A6-8845-BD4E-CB4CCA059FC4}" type="datetimeFigureOut">
-              <a:rPr lang="en-US" smtClean="0"/>
-              <a:t>1/27/13</a:t>
+              <a:t>7/18/2026</a:t>
             </a:fld>
             <a:endParaRPr lang="en-US"/>
           </a:p>
@@ -464,7 +457,13 @@
       </p:sp>
       <p:sp>
         <p:nvSpPr>
-          <p:cNvPr id="5" name="Footer Placeholder 4"/>
+          <p:cNvPr id="5" name="Footer Placeholder 4">
+            <a:extLst>
+              <a:ext uri="{FF2B5EF4-FFF2-40B4-BE49-F238E27FC236}">
+                <a16:creationId xmlns:a16="http://schemas.microsoft.com/office/drawing/2014/main" id="{A47F6766-39FF-819F-E97D-3A1DD1553B78}"/>
+              </a:ext>
+            </a:extLst>
+          </p:cNvPr>
           <p:cNvSpPr>
             <a:spLocks noGrp="1"/>
           </p:cNvSpPr>
@@ -483,7 +482,13 @@
       </p:sp>
       <p:sp>
         <p:nvSpPr>
-          <p:cNvPr id="6" name="Slide Number Placeholder 5"/>
+          <p:cNvPr id="6" name="Slide Number Placeholder 5">
+            <a:extLst>
+              <a:ext uri="{FF2B5EF4-FFF2-40B4-BE49-F238E27FC236}">
+                <a16:creationId xmlns:a16="http://schemas.microsoft.com/office/drawing/2014/main" id="{78C69F33-EE15-76E4-CAFD-23A5041F63BE}"/>
+              </a:ext>
+            </a:extLst>
+          </p:cNvPr>
           <p:cNvSpPr>
             <a:spLocks noGrp="1"/>
           </p:cNvSpPr>
@@ -496,7 +501,7 @@
           <a:bodyPr/>
           <a:lstStyle/>
           <a:p>
-            <a:fld id="{C1FF6DA9-008F-8B48-92A6-B652298478BF}" type="slidenum">
+            <a:fld id="{DD65504E-0CE5-4727-AA73-EB6D2F187A51}" type="slidenum">
               <a:rPr lang="en-US" smtClean="0"/>
               <a:t>‹#›</a:t>
             </a:fld>
@@ -507,7 +512,7 @@
     </p:spTree>
     <p:extLst>
       <p:ext uri="{BB962C8B-B14F-4D97-AF65-F5344CB8AC3E}">
-        <p14:creationId xmlns:p14="http://schemas.microsoft.com/office/powerpoint/2010/main" val="2910927964"/>
+        <p14:creationId xmlns:p14="http://schemas.microsoft.com/office/powerpoint/2010/main" val="1843441200"/>
       </p:ext>
     </p:extLst>
   </p:cSld>
@@ -536,7 +541,13 @@
       </p:grpSpPr>
       <p:sp>
         <p:nvSpPr>
-          <p:cNvPr id="2" name="Vertical Title 1"/>
+          <p:cNvPr id="2" name="Vertical Title 1">
+            <a:extLst>
+              <a:ext uri="{FF2B5EF4-FFF2-40B4-BE49-F238E27FC236}">
+                <a16:creationId xmlns:a16="http://schemas.microsoft.com/office/drawing/2014/main" id="{4F523E9E-C459-CF18-0C3D-3710C7713476}"/>
+              </a:ext>
+            </a:extLst>
+          </p:cNvPr>
           <p:cNvSpPr>
             <a:spLocks noGrp="1"/>
           </p:cNvSpPr>
@@ -546,8 +557,8 @@
         </p:nvSpPr>
         <p:spPr>
           <a:xfrm>
-            <a:off x="6629400" y="274638"/>
-            <a:ext cx="2057400" cy="5851525"/>
+            <a:off x="8724900" y="365125"/>
+            <a:ext cx="2628900" cy="5811838"/>
           </a:xfrm>
         </p:spPr>
         <p:txBody>
@@ -555,16 +566,21 @@
           <a:lstStyle/>
           <a:p>
             <a:r>
-              <a:rPr lang="en-US" smtClean="0"/>
+              <a:rPr lang="en-US"/>
               <a:t>Click to edit Master title style</a:t>
             </a:r>
-            <a:endParaRPr lang="en-US"/>
-          </a:p>
-        </p:txBody>
-      </p:sp>
-      <p:sp>
-        <p:nvSpPr>
-          <p:cNvPr id="3" name="Vertical Text Placeholder 2"/>
+          </a:p>
+        </p:txBody>
+      </p:sp>
+      <p:sp>
+        <p:nvSpPr>
+          <p:cNvPr id="3" name="Vertical Text Placeholder 2">
+            <a:extLst>
+              <a:ext uri="{FF2B5EF4-FFF2-40B4-BE49-F238E27FC236}">
+                <a16:creationId xmlns:a16="http://schemas.microsoft.com/office/drawing/2014/main" id="{EB70C6A8-BB94-D2EF-5321-6EC53E1D7AA7}"/>
+              </a:ext>
+            </a:extLst>
+          </p:cNvPr>
           <p:cNvSpPr>
             <a:spLocks noGrp="1"/>
           </p:cNvSpPr>
@@ -574,8 +590,8 @@
         </p:nvSpPr>
         <p:spPr>
           <a:xfrm>
-            <a:off x="457200" y="274638"/>
-            <a:ext cx="6019800" cy="5851525"/>
+            <a:off x="838200" y="365125"/>
+            <a:ext cx="7734300" cy="5811838"/>
           </a:xfrm>
         </p:spPr>
         <p:txBody>
@@ -584,59 +600,64 @@
           <a:p>
             <a:pPr lvl="0"/>
             <a:r>
+              <a:rPr lang="en-US"/>
+              <a:t>Click to edit Master text styles</a:t>
+            </a:r>
+          </a:p>
+          <a:p>
+            <a:pPr lvl="1"/>
+            <a:r>
+              <a:rPr lang="en-US"/>
+              <a:t>Second level</a:t>
+            </a:r>
+          </a:p>
+          <a:p>
+            <a:pPr lvl="2"/>
+            <a:r>
+              <a:rPr lang="en-US"/>
+              <a:t>Third level</a:t>
+            </a:r>
+          </a:p>
+          <a:p>
+            <a:pPr lvl="3"/>
+            <a:r>
+              <a:rPr lang="en-US"/>
+              <a:t>Fourth level</a:t>
+            </a:r>
+          </a:p>
+          <a:p>
+            <a:pPr lvl="4"/>
+            <a:r>
+              <a:rPr lang="en-US"/>
+              <a:t>Fifth level</a:t>
+            </a:r>
+          </a:p>
+        </p:txBody>
+      </p:sp>
+      <p:sp>
+        <p:nvSpPr>
+          <p:cNvPr id="4" name="Date Placeholder 3">
+            <a:extLst>
+              <a:ext uri="{FF2B5EF4-FFF2-40B4-BE49-F238E27FC236}">
+                <a16:creationId xmlns:a16="http://schemas.microsoft.com/office/drawing/2014/main" id="{48FA116C-E324-DCF7-2A36-14688A167751}"/>
+              </a:ext>
+            </a:extLst>
+          </p:cNvPr>
+          <p:cNvSpPr>
+            <a:spLocks noGrp="1"/>
+          </p:cNvSpPr>
+          <p:nvPr>
+            <p:ph type="dt" sz="half" idx="10"/>
+          </p:nvPr>
+        </p:nvSpPr>
+        <p:spPr/>
+        <p:txBody>
+          <a:bodyPr/>
+          <a:lstStyle/>
+          <a:p>
+            <a:fld id="{74017AE6-BB44-43EC-A7A9-B4B79CC7F5BB}" type="datetimeFigureOut">
               <a:rPr lang="en-US" smtClean="0"/>
-              <a:t>Click to edit Master text styles</a:t>
-            </a:r>
-          </a:p>
-          <a:p>
-            <a:pPr lvl="1"/>
-            <a:r>
-              <a:rPr lang="en-US" smtClean="0"/>
-              <a:t>Second level</a:t>
-            </a:r>
-          </a:p>
-          <a:p>
-            <a:pPr lvl="2"/>
-            <a:r>
-              <a:rPr lang="en-US" smtClean="0"/>
-              <a:t>Third level</a:t>
-            </a:r>
-          </a:p>
-          <a:p>
-            <a:pPr lvl="3"/>
-            <a:r>
-              <a:rPr lang="en-US" smtClean="0"/>
-              <a:t>Fourth level</a:t>
-            </a:r>
-          </a:p>
-          <a:p>
-            <a:pPr lvl="4"/>
-            <a:r>
-              <a:rPr lang="en-US" smtClean="0"/>
-              <a:t>Fifth level</a:t>
-            </a:r>
-            <a:endParaRPr lang="en-US"/>
-          </a:p>
-        </p:txBody>
-      </p:sp>
-      <p:sp>
-        <p:nvSpPr>
-          <p:cNvPr id="4" name="Date Placeholder 3"/>
-          <p:cNvSpPr>
-            <a:spLocks noGrp="1"/>
-          </p:cNvSpPr>
-          <p:nvPr>
-            <p:ph type="dt" sz="half" idx="10"/>
-          </p:nvPr>
-        </p:nvSpPr>
-        <p:spPr/>
-        <p:txBody>
-          <a:bodyPr/>
-          <a:lstStyle/>
-          <a:p>
-            <a:fld id="{5BCAD085-E8A6-8845-BD4E-CB4CCA059FC4}" type="datetimeFigureOut">
-              <a:rPr lang="en-US" smtClean="0"/>
-              <a:t>1/27/13</a:t>
+              <a:t>7/18/2026</a:t>
             </a:fld>
             <a:endParaRPr lang="en-US"/>
           </a:p>
@@ -644,7 +665,13 @@
       </p:sp>
       <p:sp>
         <p:nvSpPr>
-          <p:cNvPr id="5" name="Footer Placeholder 4"/>
+          <p:cNvPr id="5" name="Footer Placeholder 4">
+            <a:extLst>
+              <a:ext uri="{FF2B5EF4-FFF2-40B4-BE49-F238E27FC236}">
+                <a16:creationId xmlns:a16="http://schemas.microsoft.com/office/drawing/2014/main" id="{4939DA7A-1916-BB2E-609F-9DABF3CC6C1B}"/>
+              </a:ext>
+            </a:extLst>
+          </p:cNvPr>
           <p:cNvSpPr>
             <a:spLocks noGrp="1"/>
           </p:cNvSpPr>
@@ -663,7 +690,13 @@
       </p:sp>
       <p:sp>
         <p:nvSpPr>
-          <p:cNvPr id="6" name="Slide Number Placeholder 5"/>
+          <p:cNvPr id="6" name="Slide Number Placeholder 5">
+            <a:extLst>
+              <a:ext uri="{FF2B5EF4-FFF2-40B4-BE49-F238E27FC236}">
+                <a16:creationId xmlns:a16="http://schemas.microsoft.com/office/drawing/2014/main" id="{2A86F394-E368-88BE-DD36-D94A8FA46818}"/>
+              </a:ext>
+            </a:extLst>
+          </p:cNvPr>
           <p:cNvSpPr>
             <a:spLocks noGrp="1"/>
           </p:cNvSpPr>
@@ -676,7 +709,7 @@
           <a:bodyPr/>
           <a:lstStyle/>
           <a:p>
-            <a:fld id="{C1FF6DA9-008F-8B48-92A6-B652298478BF}" type="slidenum">
+            <a:fld id="{DD65504E-0CE5-4727-AA73-EB6D2F187A51}" type="slidenum">
               <a:rPr lang="en-US" smtClean="0"/>
               <a:t>‹#›</a:t>
             </a:fld>
@@ -687,7 +720,7 @@
     </p:spTree>
     <p:extLst>
       <p:ext uri="{BB962C8B-B14F-4D97-AF65-F5344CB8AC3E}">
-        <p14:creationId xmlns:p14="http://schemas.microsoft.com/office/powerpoint/2010/main" val="3612223792"/>
+        <p14:creationId xmlns:p14="http://schemas.microsoft.com/office/powerpoint/2010/main" val="750136949"/>
       </p:ext>
     </p:extLst>
   </p:cSld>
@@ -716,7 +749,13 @@
       </p:grpSpPr>
       <p:sp>
         <p:nvSpPr>
-          <p:cNvPr id="2" name="Title 1"/>
+          <p:cNvPr id="2" name="Title 1">
+            <a:extLst>
+              <a:ext uri="{FF2B5EF4-FFF2-40B4-BE49-F238E27FC236}">
+                <a16:creationId xmlns:a16="http://schemas.microsoft.com/office/drawing/2014/main" id="{5C9F5A47-A83B-4E85-92AF-1ED1B40478C9}"/>
+              </a:ext>
+            </a:extLst>
+          </p:cNvPr>
           <p:cNvSpPr>
             <a:spLocks noGrp="1"/>
           </p:cNvSpPr>
@@ -730,83 +769,93 @@
           <a:lstStyle/>
           <a:p>
             <a:r>
+              <a:rPr lang="en-US"/>
+              <a:t>Click to edit Master title style</a:t>
+            </a:r>
+          </a:p>
+        </p:txBody>
+      </p:sp>
+      <p:sp>
+        <p:nvSpPr>
+          <p:cNvPr id="3" name="Content Placeholder 2">
+            <a:extLst>
+              <a:ext uri="{FF2B5EF4-FFF2-40B4-BE49-F238E27FC236}">
+                <a16:creationId xmlns:a16="http://schemas.microsoft.com/office/drawing/2014/main" id="{B850FDB4-9829-1B6B-29D1-0D17E5F2E029}"/>
+              </a:ext>
+            </a:extLst>
+          </p:cNvPr>
+          <p:cNvSpPr>
+            <a:spLocks noGrp="1"/>
+          </p:cNvSpPr>
+          <p:nvPr>
+            <p:ph idx="1"/>
+          </p:nvPr>
+        </p:nvSpPr>
+        <p:spPr/>
+        <p:txBody>
+          <a:bodyPr/>
+          <a:lstStyle/>
+          <a:p>
+            <a:pPr lvl="0"/>
+            <a:r>
+              <a:rPr lang="en-US"/>
+              <a:t>Click to edit Master text styles</a:t>
+            </a:r>
+          </a:p>
+          <a:p>
+            <a:pPr lvl="1"/>
+            <a:r>
+              <a:rPr lang="en-US"/>
+              <a:t>Second level</a:t>
+            </a:r>
+          </a:p>
+          <a:p>
+            <a:pPr lvl="2"/>
+            <a:r>
+              <a:rPr lang="en-US"/>
+              <a:t>Third level</a:t>
+            </a:r>
+          </a:p>
+          <a:p>
+            <a:pPr lvl="3"/>
+            <a:r>
+              <a:rPr lang="en-US"/>
+              <a:t>Fourth level</a:t>
+            </a:r>
+          </a:p>
+          <a:p>
+            <a:pPr lvl="4"/>
+            <a:r>
+              <a:rPr lang="en-US"/>
+              <a:t>Fifth level</a:t>
+            </a:r>
+          </a:p>
+        </p:txBody>
+      </p:sp>
+      <p:sp>
+        <p:nvSpPr>
+          <p:cNvPr id="4" name="Date Placeholder 3">
+            <a:extLst>
+              <a:ext uri="{FF2B5EF4-FFF2-40B4-BE49-F238E27FC236}">
+                <a16:creationId xmlns:a16="http://schemas.microsoft.com/office/drawing/2014/main" id="{483C035A-0AF6-85B2-33E2-B50774B9D00D}"/>
+              </a:ext>
+            </a:extLst>
+          </p:cNvPr>
+          <p:cNvSpPr>
+            <a:spLocks noGrp="1"/>
+          </p:cNvSpPr>
+          <p:nvPr>
+            <p:ph type="dt" sz="half" idx="10"/>
+          </p:nvPr>
+        </p:nvSpPr>
+        <p:spPr/>
+        <p:txBody>
+          <a:bodyPr/>
+          <a:lstStyle/>
+          <a:p>
+            <a:fld id="{74017AE6-BB44-43EC-A7A9-B4B79CC7F5BB}" type="datetimeFigureOut">
               <a:rPr lang="en-US" smtClean="0"/>
-              <a:t>Click to edit Master title style</a:t>
-            </a:r>
-            <a:endParaRPr lang="en-US"/>
-          </a:p>
-        </p:txBody>
-      </p:sp>
-      <p:sp>
-        <p:nvSpPr>
-          <p:cNvPr id="3" name="Content Placeholder 2"/>
-          <p:cNvSpPr>
-            <a:spLocks noGrp="1"/>
-          </p:cNvSpPr>
-          <p:nvPr>
-            <p:ph idx="1"/>
-          </p:nvPr>
-        </p:nvSpPr>
-        <p:spPr/>
-        <p:txBody>
-          <a:bodyPr/>
-          <a:lstStyle/>
-          <a:p>
-            <a:pPr lvl="0"/>
-            <a:r>
-              <a:rPr lang="en-US" smtClean="0"/>
-              <a:t>Click to edit Master text styles</a:t>
-            </a:r>
-          </a:p>
-          <a:p>
-            <a:pPr lvl="1"/>
-            <a:r>
-              <a:rPr lang="en-US" smtClean="0"/>
-              <a:t>Second level</a:t>
-            </a:r>
-          </a:p>
-          <a:p>
-            <a:pPr lvl="2"/>
-            <a:r>
-              <a:rPr lang="en-US" smtClean="0"/>
-              <a:t>Third level</a:t>
-            </a:r>
-          </a:p>
-          <a:p>
-            <a:pPr lvl="3"/>
-            <a:r>
-              <a:rPr lang="en-US" smtClean="0"/>
-              <a:t>Fourth level</a:t>
-            </a:r>
-          </a:p>
-          <a:p>
-            <a:pPr lvl="4"/>
-            <a:r>
-              <a:rPr lang="en-US" smtClean="0"/>
-              <a:t>Fifth level</a:t>
-            </a:r>
-            <a:endParaRPr lang="en-US"/>
-          </a:p>
-        </p:txBody>
-      </p:sp>
-      <p:sp>
-        <p:nvSpPr>
-          <p:cNvPr id="4" name="Date Placeholder 3"/>
-          <p:cNvSpPr>
-            <a:spLocks noGrp="1"/>
-          </p:cNvSpPr>
-          <p:nvPr>
-            <p:ph type="dt" sz="half" idx="10"/>
-          </p:nvPr>
-        </p:nvSpPr>
-        <p:spPr/>
-        <p:txBody>
-          <a:bodyPr/>
-          <a:lstStyle/>
-          <a:p>
-            <a:fld id="{5BCAD085-E8A6-8845-BD4E-CB4CCA059FC4}" type="datetimeFigureOut">
-              <a:rPr lang="en-US" smtClean="0"/>
-              <a:t>1/27/13</a:t>
+              <a:t>7/18/2026</a:t>
             </a:fld>
             <a:endParaRPr lang="en-US"/>
           </a:p>
@@ -814,7 +863,13 @@
       </p:sp>
       <p:sp>
         <p:nvSpPr>
-          <p:cNvPr id="5" name="Footer Placeholder 4"/>
+          <p:cNvPr id="5" name="Footer Placeholder 4">
+            <a:extLst>
+              <a:ext uri="{FF2B5EF4-FFF2-40B4-BE49-F238E27FC236}">
+                <a16:creationId xmlns:a16="http://schemas.microsoft.com/office/drawing/2014/main" id="{9038F890-26B8-3904-F2EF-3FCB682D4788}"/>
+              </a:ext>
+            </a:extLst>
+          </p:cNvPr>
           <p:cNvSpPr>
             <a:spLocks noGrp="1"/>
           </p:cNvSpPr>
@@ -833,7 +888,13 @@
       </p:sp>
       <p:sp>
         <p:nvSpPr>
-          <p:cNvPr id="6" name="Slide Number Placeholder 5"/>
+          <p:cNvPr id="6" name="Slide Number Placeholder 5">
+            <a:extLst>
+              <a:ext uri="{FF2B5EF4-FFF2-40B4-BE49-F238E27FC236}">
+                <a16:creationId xmlns:a16="http://schemas.microsoft.com/office/drawing/2014/main" id="{1233A027-460A-2646-D43D-642C630D98EA}"/>
+              </a:ext>
+            </a:extLst>
+          </p:cNvPr>
           <p:cNvSpPr>
             <a:spLocks noGrp="1"/>
           </p:cNvSpPr>
@@ -846,7 +907,7 @@
           <a:bodyPr/>
           <a:lstStyle/>
           <a:p>
-            <a:fld id="{C1FF6DA9-008F-8B48-92A6-B652298478BF}" type="slidenum">
+            <a:fld id="{DD65504E-0CE5-4727-AA73-EB6D2F187A51}" type="slidenum">
               <a:rPr lang="en-US" smtClean="0"/>
               <a:t>‹#›</a:t>
             </a:fld>
@@ -857,7 +918,7 @@
     </p:spTree>
     <p:extLst>
       <p:ext uri="{BB962C8B-B14F-4D97-AF65-F5344CB8AC3E}">
-        <p14:creationId xmlns:p14="http://schemas.microsoft.com/office/powerpoint/2010/main" val="2614314258"/>
+        <p14:creationId xmlns:p14="http://schemas.microsoft.com/office/powerpoint/2010/main" val="3614880482"/>
       </p:ext>
     </p:extLst>
   </p:cSld>
@@ -886,7 +947,13 @@
       </p:grpSpPr>
       <p:sp>
         <p:nvSpPr>
-          <p:cNvPr id="2" name="Title 1"/>
+          <p:cNvPr id="2" name="Title 1">
+            <a:extLst>
+              <a:ext uri="{FF2B5EF4-FFF2-40B4-BE49-F238E27FC236}">
+                <a16:creationId xmlns:a16="http://schemas.microsoft.com/office/drawing/2014/main" id="{70F3984C-8A4C-9DA5-9603-976D13EFBBAD}"/>
+              </a:ext>
+            </a:extLst>
+          </p:cNvPr>
           <p:cNvSpPr>
             <a:spLocks noGrp="1"/>
           </p:cNvSpPr>
@@ -896,29 +963,34 @@
         </p:nvSpPr>
         <p:spPr>
           <a:xfrm>
-            <a:off x="722313" y="4406900"/>
-            <a:ext cx="7772400" cy="1362075"/>
+            <a:off x="831850" y="1709738"/>
+            <a:ext cx="10515600" cy="2852737"/>
           </a:xfrm>
         </p:spPr>
         <p:txBody>
-          <a:bodyPr anchor="t"/>
+          <a:bodyPr anchor="b"/>
           <a:lstStyle>
-            <a:lvl1pPr algn="l">
-              <a:defRPr sz="4000" b="1" cap="all"/>
+            <a:lvl1pPr>
+              <a:defRPr sz="6000"/>
             </a:lvl1pPr>
           </a:lstStyle>
           <a:p>
             <a:r>
-              <a:rPr lang="en-US" smtClean="0"/>
+              <a:rPr lang="en-US"/>
               <a:t>Click to edit Master title style</a:t>
             </a:r>
-            <a:endParaRPr lang="en-US"/>
-          </a:p>
-        </p:txBody>
-      </p:sp>
-      <p:sp>
-        <p:nvSpPr>
-          <p:cNvPr id="3" name="Text Placeholder 2"/>
+          </a:p>
+        </p:txBody>
+      </p:sp>
+      <p:sp>
+        <p:nvSpPr>
+          <p:cNvPr id="3" name="Text Placeholder 2">
+            <a:extLst>
+              <a:ext uri="{FF2B5EF4-FFF2-40B4-BE49-F238E27FC236}">
+                <a16:creationId xmlns:a16="http://schemas.microsoft.com/office/drawing/2014/main" id="{378BB617-CE5B-AF08-592B-2F34A33E21A5}"/>
+              </a:ext>
+            </a:extLst>
+          </p:cNvPr>
           <p:cNvSpPr>
             <a:spLocks noGrp="1"/>
           </p:cNvSpPr>
@@ -928,99 +1000,99 @@
         </p:nvSpPr>
         <p:spPr>
           <a:xfrm>
-            <a:off x="722313" y="2906713"/>
-            <a:ext cx="7772400" cy="1500187"/>
+            <a:off x="831850" y="4589463"/>
+            <a:ext cx="10515600" cy="1500187"/>
           </a:xfrm>
         </p:spPr>
         <p:txBody>
-          <a:bodyPr anchor="b"/>
+          <a:bodyPr/>
           <a:lstStyle>
             <a:lvl1pPr marL="0" indent="0">
               <a:buNone/>
-              <a:defRPr sz="2000">
+              <a:defRPr sz="2400">
                 <a:solidFill>
                   <a:schemeClr val="tx1">
-                    <a:tint val="75000"/>
+                    <a:tint val="82000"/>
                   </a:schemeClr>
                 </a:solidFill>
               </a:defRPr>
             </a:lvl1pPr>
             <a:lvl2pPr marL="457200" indent="0">
               <a:buNone/>
-              <a:defRPr sz="1800">
+              <a:defRPr sz="2000">
                 <a:solidFill>
                   <a:schemeClr val="tx1">
-                    <a:tint val="75000"/>
+                    <a:tint val="82000"/>
                   </a:schemeClr>
                 </a:solidFill>
               </a:defRPr>
             </a:lvl2pPr>
             <a:lvl3pPr marL="914400" indent="0">
               <a:buNone/>
-              <a:defRPr sz="1600">
+              <a:defRPr sz="1800">
                 <a:solidFill>
                   <a:schemeClr val="tx1">
-                    <a:tint val="75000"/>
+                    <a:tint val="82000"/>
                   </a:schemeClr>
                 </a:solidFill>
               </a:defRPr>
             </a:lvl3pPr>
             <a:lvl4pPr marL="1371600" indent="0">
               <a:buNone/>
-              <a:defRPr sz="1400">
+              <a:defRPr sz="1600">
                 <a:solidFill>
                   <a:schemeClr val="tx1">
-                    <a:tint val="75000"/>
+                    <a:tint val="82000"/>
                   </a:schemeClr>
                 </a:solidFill>
               </a:defRPr>
             </a:lvl4pPr>
             <a:lvl5pPr marL="1828800" indent="0">
               <a:buNone/>
-              <a:defRPr sz="1400">
+              <a:defRPr sz="1600">
                 <a:solidFill>
                   <a:schemeClr val="tx1">
-                    <a:tint val="75000"/>
+                    <a:tint val="82000"/>
                   </a:schemeClr>
                 </a:solidFill>
               </a:defRPr>
             </a:lvl5pPr>
             <a:lvl6pPr marL="2286000" indent="0">
               <a:buNone/>
-              <a:defRPr sz="1400">
+              <a:defRPr sz="1600">
                 <a:solidFill>
                   <a:schemeClr val="tx1">
-                    <a:tint val="75000"/>
+                    <a:tint val="82000"/>
                   </a:schemeClr>
                 </a:solidFill>
               </a:defRPr>
             </a:lvl6pPr>
             <a:lvl7pPr marL="2743200" indent="0">
               <a:buNone/>
-              <a:defRPr sz="1400">
+              <a:defRPr sz="1600">
                 <a:solidFill>
                   <a:schemeClr val="tx1">
-                    <a:tint val="75000"/>
+                    <a:tint val="82000"/>
                   </a:schemeClr>
                 </a:solidFill>
               </a:defRPr>
             </a:lvl7pPr>
             <a:lvl8pPr marL="3200400" indent="0">
               <a:buNone/>
-              <a:defRPr sz="1400">
+              <a:defRPr sz="1600">
                 <a:solidFill>
                   <a:schemeClr val="tx1">
-                    <a:tint val="75000"/>
+                    <a:tint val="82000"/>
                   </a:schemeClr>
                 </a:solidFill>
               </a:defRPr>
             </a:lvl8pPr>
             <a:lvl9pPr marL="3657600" indent="0">
               <a:buNone/>
-              <a:defRPr sz="1400">
+              <a:defRPr sz="1600">
                 <a:solidFill>
                   <a:schemeClr val="tx1">
-                    <a:tint val="75000"/>
+                    <a:tint val="82000"/>
                   </a:schemeClr>
                 </a:solidFill>
               </a:defRPr>
@@ -1029,30 +1101,36 @@
           <a:p>
             <a:pPr lvl="0"/>
             <a:r>
+              <a:rPr lang="en-US"/>
+              <a:t>Click to edit Master text styles</a:t>
+            </a:r>
+          </a:p>
+        </p:txBody>
+      </p:sp>
+      <p:sp>
+        <p:nvSpPr>
+          <p:cNvPr id="4" name="Date Placeholder 3">
+            <a:extLst>
+              <a:ext uri="{FF2B5EF4-FFF2-40B4-BE49-F238E27FC236}">
+                <a16:creationId xmlns:a16="http://schemas.microsoft.com/office/drawing/2014/main" id="{05C505D0-AE48-C36D-0395-997AEE5F75B5}"/>
+              </a:ext>
+            </a:extLst>
+          </p:cNvPr>
+          <p:cNvSpPr>
+            <a:spLocks noGrp="1"/>
+          </p:cNvSpPr>
+          <p:nvPr>
+            <p:ph type="dt" sz="half" idx="10"/>
+          </p:nvPr>
+        </p:nvSpPr>
+        <p:spPr/>
+        <p:txBody>
+          <a:bodyPr/>
+          <a:lstStyle/>
+          <a:p>
+            <a:fld id="{74017AE6-BB44-43EC-A7A9-B4B79CC7F5BB}" type="datetimeFigureOut">
               <a:rPr lang="en-US" smtClean="0"/>
-              <a:t>Click to edit Master text styles</a:t>
-            </a:r>
-          </a:p>
-        </p:txBody>
-      </p:sp>
-      <p:sp>
-        <p:nvSpPr>
-          <p:cNvPr id="4" name="Date Placeholder 3"/>
-          <p:cNvSpPr>
-            <a:spLocks noGrp="1"/>
-          </p:cNvSpPr>
-          <p:nvPr>
-            <p:ph type="dt" sz="half" idx="10"/>
-          </p:nvPr>
-        </p:nvSpPr>
-        <p:spPr/>
-        <p:txBody>
-          <a:bodyPr/>
-          <a:lstStyle/>
-          <a:p>
-            <a:fld id="{5BCAD085-E8A6-8845-BD4E-CB4CCA059FC4}" type="datetimeFigureOut">
-              <a:rPr lang="en-US" smtClean="0"/>
-              <a:t>1/27/13</a:t>
+              <a:t>7/18/2026</a:t>
             </a:fld>
             <a:endParaRPr lang="en-US"/>
           </a:p>
@@ -1060,7 +1138,13 @@
       </p:sp>
       <p:sp>
         <p:nvSpPr>
-          <p:cNvPr id="5" name="Footer Placeholder 4"/>
+          <p:cNvPr id="5" name="Footer Placeholder 4">
+            <a:extLst>
+              <a:ext uri="{FF2B5EF4-FFF2-40B4-BE49-F238E27FC236}">
+                <a16:creationId xmlns:a16="http://schemas.microsoft.com/office/drawing/2014/main" id="{73E75386-704A-8C5D-C4C1-7078CCD90424}"/>
+              </a:ext>
+            </a:extLst>
+          </p:cNvPr>
           <p:cNvSpPr>
             <a:spLocks noGrp="1"/>
           </p:cNvSpPr>
@@ -1079,7 +1163,13 @@
       </p:sp>
       <p:sp>
         <p:nvSpPr>
-          <p:cNvPr id="6" name="Slide Number Placeholder 5"/>
+          <p:cNvPr id="6" name="Slide Number Placeholder 5">
+            <a:extLst>
+              <a:ext uri="{FF2B5EF4-FFF2-40B4-BE49-F238E27FC236}">
+                <a16:creationId xmlns:a16="http://schemas.microsoft.com/office/drawing/2014/main" id="{2959A20A-FF62-C595-93B3-267BF51E75FF}"/>
+              </a:ext>
+            </a:extLst>
+          </p:cNvPr>
           <p:cNvSpPr>
             <a:spLocks noGrp="1"/>
           </p:cNvSpPr>
@@ -1092,7 +1182,7 @@
           <a:bodyPr/>
           <a:lstStyle/>
           <a:p>
-            <a:fld id="{C1FF6DA9-008F-8B48-92A6-B652298478BF}" type="slidenum">
+            <a:fld id="{DD65504E-0CE5-4727-AA73-EB6D2F187A51}" type="slidenum">
               <a:rPr lang="en-US" smtClean="0"/>
               <a:t>‹#›</a:t>
             </a:fld>
@@ -1103,7 +1193,7 @@
     </p:spTree>
     <p:extLst>
       <p:ext uri="{BB962C8B-B14F-4D97-AF65-F5344CB8AC3E}">
-        <p14:creationId xmlns:p14="http://schemas.microsoft.com/office/powerpoint/2010/main" val="960648375"/>
+        <p14:creationId xmlns:p14="http://schemas.microsoft.com/office/powerpoint/2010/main" val="2397258710"/>
       </p:ext>
     </p:extLst>
   </p:cSld>
@@ -1132,7 +1222,13 @@
       </p:grpSpPr>
       <p:sp>
         <p:nvSpPr>
-          <p:cNvPr id="2" name="Title 1"/>
+          <p:cNvPr id="2" name="Title 1">
+            <a:extLst>
+              <a:ext uri="{FF2B5EF4-FFF2-40B4-BE49-F238E27FC236}">
+                <a16:creationId xmlns:a16="http://schemas.microsoft.com/office/drawing/2014/main" id="{41A76A38-A8C2-96C3-2D09-6C165E6B65B9}"/>
+              </a:ext>
+            </a:extLst>
+          </p:cNvPr>
           <p:cNvSpPr>
             <a:spLocks noGrp="1"/>
           </p:cNvSpPr>
@@ -1146,16 +1242,21 @@
           <a:lstStyle/>
           <a:p>
             <a:r>
-              <a:rPr lang="en-US" smtClean="0"/>
+              <a:rPr lang="en-US"/>
               <a:t>Click to edit Master title style</a:t>
             </a:r>
-            <a:endParaRPr lang="en-US"/>
-          </a:p>
-        </p:txBody>
-      </p:sp>
-      <p:sp>
-        <p:nvSpPr>
-          <p:cNvPr id="3" name="Content Placeholder 2"/>
+          </a:p>
+        </p:txBody>
+      </p:sp>
+      <p:sp>
+        <p:nvSpPr>
+          <p:cNvPr id="3" name="Content Placeholder 2">
+            <a:extLst>
+              <a:ext uri="{FF2B5EF4-FFF2-40B4-BE49-F238E27FC236}">
+                <a16:creationId xmlns:a16="http://schemas.microsoft.com/office/drawing/2014/main" id="{A9D17329-9A68-77D2-4A48-C9B5A569878A}"/>
+              </a:ext>
+            </a:extLst>
+          </p:cNvPr>
           <p:cNvSpPr>
             <a:spLocks noGrp="1"/>
           </p:cNvSpPr>
@@ -1165,82 +1266,59 @@
         </p:nvSpPr>
         <p:spPr>
           <a:xfrm>
-            <a:off x="457200" y="1600200"/>
-            <a:ext cx="4038600" cy="4525963"/>
+            <a:off x="838200" y="1825625"/>
+            <a:ext cx="5181600" cy="4351338"/>
           </a:xfrm>
         </p:spPr>
         <p:txBody>
           <a:bodyPr/>
-          <a:lstStyle>
-            <a:lvl1pPr>
-              <a:defRPr sz="2800"/>
-            </a:lvl1pPr>
-            <a:lvl2pPr>
-              <a:defRPr sz="2400"/>
-            </a:lvl2pPr>
-            <a:lvl3pPr>
-              <a:defRPr sz="2000"/>
-            </a:lvl3pPr>
-            <a:lvl4pPr>
-              <a:defRPr sz="1800"/>
-            </a:lvl4pPr>
-            <a:lvl5pPr>
-              <a:defRPr sz="1800"/>
-            </a:lvl5pPr>
-            <a:lvl6pPr>
-              <a:defRPr sz="1800"/>
-            </a:lvl6pPr>
-            <a:lvl7pPr>
-              <a:defRPr sz="1800"/>
-            </a:lvl7pPr>
-            <a:lvl8pPr>
-              <a:defRPr sz="1800"/>
-            </a:lvl8pPr>
-            <a:lvl9pPr>
-              <a:defRPr sz="1800"/>
-            </a:lvl9pPr>
-          </a:lstStyle>
+          <a:lstStyle/>
           <a:p>
             <a:pPr lvl="0"/>
             <a:r>
-              <a:rPr lang="en-US" smtClean="0"/>
+              <a:rPr lang="en-US"/>
               <a:t>Click to edit Master text styles</a:t>
             </a:r>
           </a:p>
           <a:p>
             <a:pPr lvl="1"/>
             <a:r>
-              <a:rPr lang="en-US" smtClean="0"/>
+              <a:rPr lang="en-US"/>
               <a:t>Second level</a:t>
             </a:r>
           </a:p>
           <a:p>
             <a:pPr lvl="2"/>
             <a:r>
-              <a:rPr lang="en-US" smtClean="0"/>
+              <a:rPr lang="en-US"/>
               <a:t>Third level</a:t>
             </a:r>
           </a:p>
           <a:p>
             <a:pPr lvl="3"/>
             <a:r>
-              <a:rPr lang="en-US" smtClean="0"/>
+              <a:rPr lang="en-US"/>
               <a:t>Fourth level</a:t>
             </a:r>
           </a:p>
           <a:p>
             <a:pPr lvl="4"/>
             <a:r>
-              <a:rPr lang="en-US" smtClean="0"/>
+              <a:rPr lang="en-US"/>
               <a:t>Fifth level</a:t>
             </a:r>
-            <a:endParaRPr lang="en-US"/>
-          </a:p>
-        </p:txBody>
-      </p:sp>
-      <p:sp>
-        <p:nvSpPr>
-          <p:cNvPr id="4" name="Content Placeholder 3"/>
+          </a:p>
+        </p:txBody>
+      </p:sp>
+      <p:sp>
+        <p:nvSpPr>
+          <p:cNvPr id="4" name="Content Placeholder 3">
+            <a:extLst>
+              <a:ext uri="{FF2B5EF4-FFF2-40B4-BE49-F238E27FC236}">
+                <a16:creationId xmlns:a16="http://schemas.microsoft.com/office/drawing/2014/main" id="{04E12598-1E7B-D46E-F1D0-C3317BA0DEB3}"/>
+              </a:ext>
+            </a:extLst>
+          </p:cNvPr>
           <p:cNvSpPr>
             <a:spLocks noGrp="1"/>
           </p:cNvSpPr>
@@ -1250,97 +1328,74 @@
         </p:nvSpPr>
         <p:spPr>
           <a:xfrm>
-            <a:off x="4648200" y="1600200"/>
-            <a:ext cx="4038600" cy="4525963"/>
+            <a:off x="6172200" y="1825625"/>
+            <a:ext cx="5181600" cy="4351338"/>
           </a:xfrm>
         </p:spPr>
         <p:txBody>
           <a:bodyPr/>
-          <a:lstStyle>
-            <a:lvl1pPr>
-              <a:defRPr sz="2800"/>
-            </a:lvl1pPr>
-            <a:lvl2pPr>
-              <a:defRPr sz="2400"/>
-            </a:lvl2pPr>
-            <a:lvl3pPr>
-              <a:defRPr sz="2000"/>
-            </a:lvl3pPr>
-            <a:lvl4pPr>
-              <a:defRPr sz="1800"/>
-            </a:lvl4pPr>
-            <a:lvl5pPr>
-              <a:defRPr sz="1800"/>
-            </a:lvl5pPr>
-            <a:lvl6pPr>
-              <a:defRPr sz="1800"/>
-            </a:lvl6pPr>
-            <a:lvl7pPr>
-              <a:defRPr sz="1800"/>
-            </a:lvl7pPr>
-            <a:lvl8pPr>
-              <a:defRPr sz="1800"/>
-            </a:lvl8pPr>
-            <a:lvl9pPr>
-              <a:defRPr sz="1800"/>
-            </a:lvl9pPr>
-          </a:lstStyle>
+          <a:lstStyle/>
           <a:p>
             <a:pPr lvl="0"/>
             <a:r>
+              <a:rPr lang="en-US"/>
+              <a:t>Click to edit Master text styles</a:t>
+            </a:r>
+          </a:p>
+          <a:p>
+            <a:pPr lvl="1"/>
+            <a:r>
+              <a:rPr lang="en-US"/>
+              <a:t>Second level</a:t>
+            </a:r>
+          </a:p>
+          <a:p>
+            <a:pPr lvl="2"/>
+            <a:r>
+              <a:rPr lang="en-US"/>
+              <a:t>Third level</a:t>
+            </a:r>
+          </a:p>
+          <a:p>
+            <a:pPr lvl="3"/>
+            <a:r>
+              <a:rPr lang="en-US"/>
+              <a:t>Fourth level</a:t>
+            </a:r>
+          </a:p>
+          <a:p>
+            <a:pPr lvl="4"/>
+            <a:r>
+              <a:rPr lang="en-US"/>
+              <a:t>Fifth level</a:t>
+            </a:r>
+          </a:p>
+        </p:txBody>
+      </p:sp>
+      <p:sp>
+        <p:nvSpPr>
+          <p:cNvPr id="5" name="Date Placeholder 4">
+            <a:extLst>
+              <a:ext uri="{FF2B5EF4-FFF2-40B4-BE49-F238E27FC236}">
+                <a16:creationId xmlns:a16="http://schemas.microsoft.com/office/drawing/2014/main" id="{3D2E39AA-8951-6BBC-BC86-2B795F88C165}"/>
+              </a:ext>
+            </a:extLst>
+          </p:cNvPr>
+          <p:cNvSpPr>
+            <a:spLocks noGrp="1"/>
+          </p:cNvSpPr>
+          <p:nvPr>
+            <p:ph type="dt" sz="half" idx="10"/>
+          </p:nvPr>
+        </p:nvSpPr>
+        <p:spPr/>
+        <p:txBody>
+          <a:bodyPr/>
+          <a:lstStyle/>
+          <a:p>
+            <a:fld id="{74017AE6-BB44-43EC-A7A9-B4B79CC7F5BB}" type="datetimeFigureOut">
               <a:rPr lang="en-US" smtClean="0"/>
-              <a:t>Click to edit Master text styles</a:t>
-            </a:r>
-          </a:p>
-          <a:p>
-            <a:pPr lvl="1"/>
-            <a:r>
-              <a:rPr lang="en-US" smtClean="0"/>
-              <a:t>Second level</a:t>
-            </a:r>
-          </a:p>
-          <a:p>
-            <a:pPr lvl="2"/>
-            <a:r>
-              <a:rPr lang="en-US" smtClean="0"/>
-              <a:t>Third level</a:t>
-            </a:r>
-          </a:p>
-          <a:p>
-            <a:pPr lvl="3"/>
-            <a:r>
-              <a:rPr lang="en-US" smtClean="0"/>
-              <a:t>Fourth level</a:t>
-            </a:r>
-          </a:p>
-          <a:p>
-            <a:pPr lvl="4"/>
-            <a:r>
-              <a:rPr lang="en-US" smtClean="0"/>
-              <a:t>Fifth level</a:t>
-            </a:r>
-            <a:endParaRPr lang="en-US"/>
-          </a:p>
-        </p:txBody>
-      </p:sp>
-      <p:sp>
-        <p:nvSpPr>
-          <p:cNvPr id="5" name="Date Placeholder 4"/>
-          <p:cNvSpPr>
-            <a:spLocks noGrp="1"/>
-          </p:cNvSpPr>
-          <p:nvPr>
-            <p:ph type="dt" sz="half" idx="10"/>
-          </p:nvPr>
-        </p:nvSpPr>
-        <p:spPr/>
-        <p:txBody>
-          <a:bodyPr/>
-          <a:lstStyle/>
-          <a:p>
-            <a:fld id="{5BCAD085-E8A6-8845-BD4E-CB4CCA059FC4}" type="datetimeFigureOut">
-              <a:rPr lang="en-US" smtClean="0"/>
-              <a:t>1/27/13</a:t>
+              <a:t>7/18/2026</a:t>
             </a:fld>
             <a:endParaRPr lang="en-US"/>
           </a:p>
@@ -1348,7 +1403,13 @@
       </p:sp>
       <p:sp>
         <p:nvSpPr>
-          <p:cNvPr id="6" name="Footer Placeholder 5"/>
+          <p:cNvPr id="6" name="Footer Placeholder 5">
+            <a:extLst>
+              <a:ext uri="{FF2B5EF4-FFF2-40B4-BE49-F238E27FC236}">
+                <a16:creationId xmlns:a16="http://schemas.microsoft.com/office/drawing/2014/main" id="{E1128E68-BE19-2CA7-E61B-62154169763C}"/>
+              </a:ext>
+            </a:extLst>
+          </p:cNvPr>
           <p:cNvSpPr>
             <a:spLocks noGrp="1"/>
           </p:cNvSpPr>
@@ -1367,7 +1428,13 @@
       </p:sp>
       <p:sp>
         <p:nvSpPr>
-          <p:cNvPr id="7" name="Slide Number Placeholder 6"/>
+          <p:cNvPr id="7" name="Slide Number Placeholder 6">
+            <a:extLst>
+              <a:ext uri="{FF2B5EF4-FFF2-40B4-BE49-F238E27FC236}">
+                <a16:creationId xmlns:a16="http://schemas.microsoft.com/office/drawing/2014/main" id="{E2C5AF4B-8B3A-E5EC-8C71-463A2C1C3CAE}"/>
+              </a:ext>
+            </a:extLst>
+          </p:cNvPr>
           <p:cNvSpPr>
             <a:spLocks noGrp="1"/>
           </p:cNvSpPr>
@@ -1380,7 +1447,7 @@
           <a:bodyPr/>
           <a:lstStyle/>
           <a:p>
-            <a:fld id="{C1FF6DA9-008F-8B48-92A6-B652298478BF}" type="slidenum">
+            <a:fld id="{DD65504E-0CE5-4727-AA73-EB6D2F187A51}" type="slidenum">
               <a:rPr lang="en-US" smtClean="0"/>
               <a:t>‹#›</a:t>
             </a:fld>
@@ -1391,7 +1458,7 @@
     </p:spTree>
     <p:extLst>
       <p:ext uri="{BB962C8B-B14F-4D97-AF65-F5344CB8AC3E}">
-        <p14:creationId xmlns:p14="http://schemas.microsoft.com/office/powerpoint/2010/main" val="2782244947"/>
+        <p14:creationId xmlns:p14="http://schemas.microsoft.com/office/powerpoint/2010/main" val="1957056605"/>
       </p:ext>
     </p:extLst>
   </p:cSld>
@@ -1420,45 +1487,57 @@
       </p:grpSpPr>
       <p:sp>
         <p:nvSpPr>
-          <p:cNvPr id="2" name="Title 1"/>
+          <p:cNvPr id="2" name="Title 1">
+            <a:extLst>
+              <a:ext uri="{FF2B5EF4-FFF2-40B4-BE49-F238E27FC236}">
+                <a16:creationId xmlns:a16="http://schemas.microsoft.com/office/drawing/2014/main" id="{09348270-95CC-17B2-9E2E-62632AE0BE7C}"/>
+              </a:ext>
+            </a:extLst>
+          </p:cNvPr>
           <p:cNvSpPr>
             <a:spLocks noGrp="1"/>
           </p:cNvSpPr>
           <p:nvPr>
             <p:ph type="title"/>
-          </p:nvPr>
-        </p:nvSpPr>
-        <p:spPr/>
-        <p:txBody>
-          <a:bodyPr/>
-          <a:lstStyle>
-            <a:lvl1pPr>
-              <a:defRPr/>
-            </a:lvl1pPr>
-          </a:lstStyle>
-          <a:p>
-            <a:r>
-              <a:rPr lang="en-US" smtClean="0"/>
-              <a:t>Click to edit Master title style</a:t>
-            </a:r>
-            <a:endParaRPr lang="en-US"/>
-          </a:p>
-        </p:txBody>
-      </p:sp>
-      <p:sp>
-        <p:nvSpPr>
-          <p:cNvPr id="3" name="Text Placeholder 2"/>
-          <p:cNvSpPr>
-            <a:spLocks noGrp="1"/>
-          </p:cNvSpPr>
-          <p:nvPr>
-            <p:ph type="body" idx="1"/>
           </p:nvPr>
         </p:nvSpPr>
         <p:spPr>
           <a:xfrm>
-            <a:off x="457200" y="1535113"/>
-            <a:ext cx="4040188" cy="639762"/>
+            <a:off x="839788" y="365125"/>
+            <a:ext cx="10515600" cy="1325563"/>
+          </a:xfrm>
+        </p:spPr>
+        <p:txBody>
+          <a:bodyPr/>
+          <a:lstStyle/>
+          <a:p>
+            <a:r>
+              <a:rPr lang="en-US"/>
+              <a:t>Click to edit Master title style</a:t>
+            </a:r>
+          </a:p>
+        </p:txBody>
+      </p:sp>
+      <p:sp>
+        <p:nvSpPr>
+          <p:cNvPr id="3" name="Text Placeholder 2">
+            <a:extLst>
+              <a:ext uri="{FF2B5EF4-FFF2-40B4-BE49-F238E27FC236}">
+                <a16:creationId xmlns:a16="http://schemas.microsoft.com/office/drawing/2014/main" id="{ADA24611-B460-6D34-602C-4221FDEB0EB1}"/>
+              </a:ext>
+            </a:extLst>
+          </p:cNvPr>
+          <p:cNvSpPr>
+            <a:spLocks noGrp="1"/>
+          </p:cNvSpPr>
+          <p:nvPr>
+            <p:ph type="body" idx="1"/>
+          </p:nvPr>
+        </p:nvSpPr>
+        <p:spPr>
+          <a:xfrm>
+            <a:off x="839788" y="1681163"/>
+            <a:ext cx="5157787" cy="823912"/>
           </a:xfrm>
         </p:spPr>
         <p:txBody>
@@ -1504,7 +1583,7 @@
           <a:p>
             <a:pPr lvl="0"/>
             <a:r>
-              <a:rPr lang="en-US" smtClean="0"/>
+              <a:rPr lang="en-US"/>
               <a:t>Click to edit Master text styles</a:t>
             </a:r>
           </a:p>
@@ -1512,7 +1591,13 @@
       </p:sp>
       <p:sp>
         <p:nvSpPr>
-          <p:cNvPr id="4" name="Content Placeholder 3"/>
+          <p:cNvPr id="4" name="Content Placeholder 3">
+            <a:extLst>
+              <a:ext uri="{FF2B5EF4-FFF2-40B4-BE49-F238E27FC236}">
+                <a16:creationId xmlns:a16="http://schemas.microsoft.com/office/drawing/2014/main" id="{C7FDF023-5376-8095-CF78-19E47BC2C83A}"/>
+              </a:ext>
+            </a:extLst>
+          </p:cNvPr>
           <p:cNvSpPr>
             <a:spLocks noGrp="1"/>
           </p:cNvSpPr>
@@ -1522,82 +1607,59 @@
         </p:nvSpPr>
         <p:spPr>
           <a:xfrm>
-            <a:off x="457200" y="2174875"/>
-            <a:ext cx="4040188" cy="3951288"/>
+            <a:off x="839788" y="2505075"/>
+            <a:ext cx="5157787" cy="3684588"/>
           </a:xfrm>
         </p:spPr>
         <p:txBody>
           <a:bodyPr/>
-          <a:lstStyle>
-            <a:lvl1pPr>
-              <a:defRPr sz="2400"/>
-            </a:lvl1pPr>
-            <a:lvl2pPr>
-              <a:defRPr sz="2000"/>
-            </a:lvl2pPr>
-            <a:lvl3pPr>
-              <a:defRPr sz="1800"/>
-            </a:lvl3pPr>
-            <a:lvl4pPr>
-              <a:defRPr sz="1600"/>
-            </a:lvl4pPr>
-            <a:lvl5pPr>
-              <a:defRPr sz="1600"/>
-            </a:lvl5pPr>
-            <a:lvl6pPr>
-              <a:defRPr sz="1600"/>
-            </a:lvl6pPr>
-            <a:lvl7pPr>
-              <a:defRPr sz="1600"/>
-            </a:lvl7pPr>
-            <a:lvl8pPr>
-              <a:defRPr sz="1600"/>
-            </a:lvl8pPr>
-            <a:lvl9pPr>
-              <a:defRPr sz="1600"/>
-            </a:lvl9pPr>
-          </a:lstStyle>
+          <a:lstStyle/>
           <a:p>
             <a:pPr lvl="0"/>
             <a:r>
-              <a:rPr lang="en-US" smtClean="0"/>
+              <a:rPr lang="en-US"/>
               <a:t>Click to edit Master text styles</a:t>
             </a:r>
           </a:p>
           <a:p>
             <a:pPr lvl="1"/>
             <a:r>
-              <a:rPr lang="en-US" smtClean="0"/>
+              <a:rPr lang="en-US"/>
               <a:t>Second level</a:t>
             </a:r>
           </a:p>
           <a:p>
             <a:pPr lvl="2"/>
             <a:r>
-              <a:rPr lang="en-US" smtClean="0"/>
+              <a:rPr lang="en-US"/>
               <a:t>Third level</a:t>
             </a:r>
           </a:p>
           <a:p>
             <a:pPr lvl="3"/>
             <a:r>
-              <a:rPr lang="en-US" smtClean="0"/>
+              <a:rPr lang="en-US"/>
               <a:t>Fourth level</a:t>
             </a:r>
           </a:p>
           <a:p>
             <a:pPr lvl="4"/>
             <a:r>
-              <a:rPr lang="en-US" smtClean="0"/>
+              <a:rPr lang="en-US"/>
               <a:t>Fifth level</a:t>
             </a:r>
-            <a:endParaRPr lang="en-US"/>
-          </a:p>
-        </p:txBody>
-      </p:sp>
-      <p:sp>
-        <p:nvSpPr>
-          <p:cNvPr id="5" name="Text Placeholder 4"/>
+          </a:p>
+        </p:txBody>
+      </p:sp>
+      <p:sp>
+        <p:nvSpPr>
+          <p:cNvPr id="5" name="Text Placeholder 4">
+            <a:extLst>
+              <a:ext uri="{FF2B5EF4-FFF2-40B4-BE49-F238E27FC236}">
+                <a16:creationId xmlns:a16="http://schemas.microsoft.com/office/drawing/2014/main" id="{5F2B3B22-54C7-E48E-49CE-ADE6F9E044C4}"/>
+              </a:ext>
+            </a:extLst>
+          </p:cNvPr>
           <p:cNvSpPr>
             <a:spLocks noGrp="1"/>
           </p:cNvSpPr>
@@ -1607,8 +1669,8 @@
         </p:nvSpPr>
         <p:spPr>
           <a:xfrm>
-            <a:off x="4645025" y="1535113"/>
-            <a:ext cx="4041775" cy="639762"/>
+            <a:off x="6172200" y="1681163"/>
+            <a:ext cx="5183188" cy="823912"/>
           </a:xfrm>
         </p:spPr>
         <p:txBody>
@@ -1654,7 +1716,7 @@
           <a:p>
             <a:pPr lvl="0"/>
             <a:r>
-              <a:rPr lang="en-US" smtClean="0"/>
+              <a:rPr lang="en-US"/>
               <a:t>Click to edit Master text styles</a:t>
             </a:r>
           </a:p>
@@ -1662,7 +1724,13 @@
       </p:sp>
       <p:sp>
         <p:nvSpPr>
-          <p:cNvPr id="6" name="Content Placeholder 5"/>
+          <p:cNvPr id="6" name="Content Placeholder 5">
+            <a:extLst>
+              <a:ext uri="{FF2B5EF4-FFF2-40B4-BE49-F238E27FC236}">
+                <a16:creationId xmlns:a16="http://schemas.microsoft.com/office/drawing/2014/main" id="{E72E69C6-C238-04BA-5EE3-9B472EE55090}"/>
+              </a:ext>
+            </a:extLst>
+          </p:cNvPr>
           <p:cNvSpPr>
             <a:spLocks noGrp="1"/>
           </p:cNvSpPr>
@@ -1672,97 +1740,74 @@
         </p:nvSpPr>
         <p:spPr>
           <a:xfrm>
-            <a:off x="4645025" y="2174875"/>
-            <a:ext cx="4041775" cy="3951288"/>
+            <a:off x="6172200" y="2505075"/>
+            <a:ext cx="5183188" cy="3684588"/>
           </a:xfrm>
         </p:spPr>
         <p:txBody>
           <a:bodyPr/>
-          <a:lstStyle>
-            <a:lvl1pPr>
-              <a:defRPr sz="2400"/>
-            </a:lvl1pPr>
-            <a:lvl2pPr>
-              <a:defRPr sz="2000"/>
-            </a:lvl2pPr>
-            <a:lvl3pPr>
-              <a:defRPr sz="1800"/>
-            </a:lvl3pPr>
-            <a:lvl4pPr>
-              <a:defRPr sz="1600"/>
-            </a:lvl4pPr>
-            <a:lvl5pPr>
-              <a:defRPr sz="1600"/>
-            </a:lvl5pPr>
-            <a:lvl6pPr>
-              <a:defRPr sz="1600"/>
-            </a:lvl6pPr>
-            <a:lvl7pPr>
-              <a:defRPr sz="1600"/>
-            </a:lvl7pPr>
-            <a:lvl8pPr>
-              <a:defRPr sz="1600"/>
-            </a:lvl8pPr>
-            <a:lvl9pPr>
-              <a:defRPr sz="1600"/>
-            </a:lvl9pPr>
-          </a:lstStyle>
+          <a:lstStyle/>
           <a:p>
             <a:pPr lvl="0"/>
             <a:r>
+              <a:rPr lang="en-US"/>
+              <a:t>Click to edit Master text styles</a:t>
+            </a:r>
+          </a:p>
+          <a:p>
+            <a:pPr lvl="1"/>
+            <a:r>
+              <a:rPr lang="en-US"/>
+              <a:t>Second level</a:t>
+            </a:r>
+          </a:p>
+          <a:p>
+            <a:pPr lvl="2"/>
+            <a:r>
+              <a:rPr lang="en-US"/>
+              <a:t>Third level</a:t>
+            </a:r>
+          </a:p>
+          <a:p>
+            <a:pPr lvl="3"/>
+            <a:r>
+              <a:rPr lang="en-US"/>
+              <a:t>Fourth level</a:t>
+            </a:r>
+          </a:p>
+          <a:p>
+            <a:pPr lvl="4"/>
+            <a:r>
+              <a:rPr lang="en-US"/>
+              <a:t>Fifth level</a:t>
+            </a:r>
+          </a:p>
+        </p:txBody>
+      </p:sp>
+      <p:sp>
+        <p:nvSpPr>
+          <p:cNvPr id="7" name="Date Placeholder 6">
+            <a:extLst>
+              <a:ext uri="{FF2B5EF4-FFF2-40B4-BE49-F238E27FC236}">
+                <a16:creationId xmlns:a16="http://schemas.microsoft.com/office/drawing/2014/main" id="{E084AD07-B376-4991-2B93-7C297F322587}"/>
+              </a:ext>
+            </a:extLst>
+          </p:cNvPr>
+          <p:cNvSpPr>
+            <a:spLocks noGrp="1"/>
+          </p:cNvSpPr>
+          <p:nvPr>
+            <p:ph type="dt" sz="half" idx="10"/>
+          </p:nvPr>
+        </p:nvSpPr>
+        <p:spPr/>
+        <p:txBody>
+          <a:bodyPr/>
+          <a:lstStyle/>
+          <a:p>
+            <a:fld id="{74017AE6-BB44-43EC-A7A9-B4B79CC7F5BB}" type="datetimeFigureOut">
               <a:rPr lang="en-US" smtClean="0"/>
-              <a:t>Click to edit Master text styles</a:t>
-            </a:r>
-          </a:p>
-          <a:p>
-            <a:pPr lvl="1"/>
-            <a:r>
-              <a:rPr lang="en-US" smtClean="0"/>
-              <a:t>Second level</a:t>
-            </a:r>
-          </a:p>
-          <a:p>
-            <a:pPr lvl="2"/>
-            <a:r>
-              <a:rPr lang="en-US" smtClean="0"/>
-              <a:t>Third level</a:t>
-            </a:r>
-          </a:p>
-          <a:p>
-            <a:pPr lvl="3"/>
-            <a:r>
-              <a:rPr lang="en-US" smtClean="0"/>
-              <a:t>Fourth level</a:t>
-            </a:r>
-          </a:p>
-          <a:p>
-            <a:pPr lvl="4"/>
-            <a:r>
-              <a:rPr lang="en-US" smtClean="0"/>
-              <a:t>Fifth level</a:t>
-            </a:r>
-            <a:endParaRPr lang="en-US"/>
-          </a:p>
-        </p:txBody>
-      </p:sp>
-      <p:sp>
-        <p:nvSpPr>
-          <p:cNvPr id="7" name="Date Placeholder 6"/>
-          <p:cNvSpPr>
-            <a:spLocks noGrp="1"/>
-          </p:cNvSpPr>
-          <p:nvPr>
-            <p:ph type="dt" sz="half" idx="10"/>
-          </p:nvPr>
-        </p:nvSpPr>
-        <p:spPr/>
-        <p:txBody>
-          <a:bodyPr/>
-          <a:lstStyle/>
-          <a:p>
-            <a:fld id="{5BCAD085-E8A6-8845-BD4E-CB4CCA059FC4}" type="datetimeFigureOut">
-              <a:rPr lang="en-US" smtClean="0"/>
-              <a:t>1/27/13</a:t>
+              <a:t>7/18/2026</a:t>
             </a:fld>
             <a:endParaRPr lang="en-US"/>
           </a:p>
@@ -1770,7 +1815,13 @@
       </p:sp>
       <p:sp>
         <p:nvSpPr>
-          <p:cNvPr id="8" name="Footer Placeholder 7"/>
+          <p:cNvPr id="8" name="Footer Placeholder 7">
+            <a:extLst>
+              <a:ext uri="{FF2B5EF4-FFF2-40B4-BE49-F238E27FC236}">
+                <a16:creationId xmlns:a16="http://schemas.microsoft.com/office/drawing/2014/main" id="{7581F18D-9E77-B9AE-9ADC-4E450FBED0FF}"/>
+              </a:ext>
+            </a:extLst>
+          </p:cNvPr>
           <p:cNvSpPr>
             <a:spLocks noGrp="1"/>
           </p:cNvSpPr>
@@ -1789,7 +1840,13 @@
       </p:sp>
       <p:sp>
         <p:nvSpPr>
-          <p:cNvPr id="9" name="Slide Number Placeholder 8"/>
+          <p:cNvPr id="9" name="Slide Number Placeholder 8">
+            <a:extLst>
+              <a:ext uri="{FF2B5EF4-FFF2-40B4-BE49-F238E27FC236}">
+                <a16:creationId xmlns:a16="http://schemas.microsoft.com/office/drawing/2014/main" id="{52506E82-76F3-B087-6F75-5D5E1254F972}"/>
+              </a:ext>
+            </a:extLst>
+          </p:cNvPr>
           <p:cNvSpPr>
             <a:spLocks noGrp="1"/>
           </p:cNvSpPr>
@@ -1802,7 +1859,7 @@
           <a:bodyPr/>
           <a:lstStyle/>
           <a:p>
-            <a:fld id="{C1FF6DA9-008F-8B48-92A6-B652298478BF}" type="slidenum">
+            <a:fld id="{DD65504E-0CE5-4727-AA73-EB6D2F187A51}" type="slidenum">
               <a:rPr lang="en-US" smtClean="0"/>
               <a:t>‹#›</a:t>
             </a:fld>
@@ -1813,7 +1870,7 @@
     </p:spTree>
     <p:extLst>
       <p:ext uri="{BB962C8B-B14F-4D97-AF65-F5344CB8AC3E}">
-        <p14:creationId xmlns:p14="http://schemas.microsoft.com/office/powerpoint/2010/main" val="990158736"/>
+        <p14:creationId xmlns:p14="http://schemas.microsoft.com/office/powerpoint/2010/main" val="4056394903"/>
       </p:ext>
     </p:extLst>
   </p:cSld>
@@ -1842,7 +1899,13 @@
       </p:grpSpPr>
       <p:sp>
         <p:nvSpPr>
-          <p:cNvPr id="2" name="Title 1"/>
+          <p:cNvPr id="2" name="Title 1">
+            <a:extLst>
+              <a:ext uri="{FF2B5EF4-FFF2-40B4-BE49-F238E27FC236}">
+                <a16:creationId xmlns:a16="http://schemas.microsoft.com/office/drawing/2014/main" id="{5D94757C-7E33-92E1-8039-4E7FA1733D04}"/>
+              </a:ext>
+            </a:extLst>
+          </p:cNvPr>
           <p:cNvSpPr>
             <a:spLocks noGrp="1"/>
           </p:cNvSpPr>
@@ -1856,31 +1919,36 @@
           <a:lstStyle/>
           <a:p>
             <a:r>
+              <a:rPr lang="en-US"/>
+              <a:t>Click to edit Master title style</a:t>
+            </a:r>
+          </a:p>
+        </p:txBody>
+      </p:sp>
+      <p:sp>
+        <p:nvSpPr>
+          <p:cNvPr id="3" name="Date Placeholder 2">
+            <a:extLst>
+              <a:ext uri="{FF2B5EF4-FFF2-40B4-BE49-F238E27FC236}">
+                <a16:creationId xmlns:a16="http://schemas.microsoft.com/office/drawing/2014/main" id="{FDFCBD5C-4402-A557-7874-5810043743BB}"/>
+              </a:ext>
+            </a:extLst>
+          </p:cNvPr>
+          <p:cNvSpPr>
+            <a:spLocks noGrp="1"/>
+          </p:cNvSpPr>
+          <p:nvPr>
+            <p:ph type="dt" sz="half" idx="10"/>
+          </p:nvPr>
+        </p:nvSpPr>
+        <p:spPr/>
+        <p:txBody>
+          <a:bodyPr/>
+          <a:lstStyle/>
+          <a:p>
+            <a:fld id="{74017AE6-BB44-43EC-A7A9-B4B79CC7F5BB}" type="datetimeFigureOut">
               <a:rPr lang="en-US" smtClean="0"/>
-              <a:t>Click to edit Master title style</a:t>
-            </a:r>
-            <a:endParaRPr lang="en-US"/>
-          </a:p>
-        </p:txBody>
-      </p:sp>
-      <p:sp>
-        <p:nvSpPr>
-          <p:cNvPr id="3" name="Date Placeholder 2"/>
-          <p:cNvSpPr>
-            <a:spLocks noGrp="1"/>
-          </p:cNvSpPr>
-          <p:nvPr>
-            <p:ph type="dt" sz="half" idx="10"/>
-          </p:nvPr>
-        </p:nvSpPr>
-        <p:spPr/>
-        <p:txBody>
-          <a:bodyPr/>
-          <a:lstStyle/>
-          <a:p>
-            <a:fld id="{5BCAD085-E8A6-8845-BD4E-CB4CCA059FC4}" type="datetimeFigureOut">
-              <a:rPr lang="en-US" smtClean="0"/>
-              <a:t>1/27/13</a:t>
+              <a:t>7/18/2026</a:t>
             </a:fld>
             <a:endParaRPr lang="en-US"/>
           </a:p>
@@ -1888,7 +1956,13 @@
       </p:sp>
       <p:sp>
         <p:nvSpPr>
-          <p:cNvPr id="4" name="Footer Placeholder 3"/>
+          <p:cNvPr id="4" name="Footer Placeholder 3">
+            <a:extLst>
+              <a:ext uri="{FF2B5EF4-FFF2-40B4-BE49-F238E27FC236}">
+                <a16:creationId xmlns:a16="http://schemas.microsoft.com/office/drawing/2014/main" id="{462A09D2-0726-A581-E271-7A3B12FC7EF3}"/>
+              </a:ext>
+            </a:extLst>
+          </p:cNvPr>
           <p:cNvSpPr>
             <a:spLocks noGrp="1"/>
           </p:cNvSpPr>
@@ -1907,7 +1981,13 @@
       </p:sp>
       <p:sp>
         <p:nvSpPr>
-          <p:cNvPr id="5" name="Slide Number Placeholder 4"/>
+          <p:cNvPr id="5" name="Slide Number Placeholder 4">
+            <a:extLst>
+              <a:ext uri="{FF2B5EF4-FFF2-40B4-BE49-F238E27FC236}">
+                <a16:creationId xmlns:a16="http://schemas.microsoft.com/office/drawing/2014/main" id="{496D0EF3-9EE4-70E1-ECFB-E44D3D117279}"/>
+              </a:ext>
+            </a:extLst>
+          </p:cNvPr>
           <p:cNvSpPr>
             <a:spLocks noGrp="1"/>
           </p:cNvSpPr>
@@ -1920,7 +2000,7 @@
           <a:bodyPr/>
           <a:lstStyle/>
           <a:p>
-            <a:fld id="{C1FF6DA9-008F-8B48-92A6-B652298478BF}" type="slidenum">
+            <a:fld id="{DD65504E-0CE5-4727-AA73-EB6D2F187A51}" type="slidenum">
               <a:rPr lang="en-US" smtClean="0"/>
               <a:t>‹#›</a:t>
             </a:fld>
@@ -1931,7 +2011,7 @@
     </p:spTree>
     <p:extLst>
       <p:ext uri="{BB962C8B-B14F-4D97-AF65-F5344CB8AC3E}">
-        <p14:creationId xmlns:p14="http://schemas.microsoft.com/office/powerpoint/2010/main" val="727027711"/>
+        <p14:creationId xmlns:p14="http://schemas.microsoft.com/office/powerpoint/2010/main" val="1927233434"/>
       </p:ext>
     </p:extLst>
   </p:cSld>
@@ -1960,7 +2040,13 @@
       </p:grpSpPr>
       <p:sp>
         <p:nvSpPr>
-          <p:cNvPr id="2" name="Date Placeholder 1"/>
+          <p:cNvPr id="2" name="Date Placeholder 1">
+            <a:extLst>
+              <a:ext uri="{FF2B5EF4-FFF2-40B4-BE49-F238E27FC236}">
+                <a16:creationId xmlns:a16="http://schemas.microsoft.com/office/drawing/2014/main" id="{2E7C0C8C-34BF-1550-494F-52091F20D79B}"/>
+              </a:ext>
+            </a:extLst>
+          </p:cNvPr>
           <p:cNvSpPr>
             <a:spLocks noGrp="1"/>
           </p:cNvSpPr>
@@ -1973,9 +2059,9 @@
           <a:bodyPr/>
           <a:lstStyle/>
           <a:p>
-            <a:fld id="{5BCAD085-E8A6-8845-BD4E-CB4CCA059FC4}" type="datetimeFigureOut">
+            <a:fld id="{74017AE6-BB44-43EC-A7A9-B4B79CC7F5BB}" type="datetimeFigureOut">
               <a:rPr lang="en-US" smtClean="0"/>
-              <a:t>1/27/13</a:t>
+              <a:t>7/18/2026</a:t>
             </a:fld>
             <a:endParaRPr lang="en-US"/>
           </a:p>
@@ -1983,7 +2069,13 @@
       </p:sp>
       <p:sp>
         <p:nvSpPr>
-          <p:cNvPr id="3" name="Footer Placeholder 2"/>
+          <p:cNvPr id="3" name="Footer Placeholder 2">
+            <a:extLst>
+              <a:ext uri="{FF2B5EF4-FFF2-40B4-BE49-F238E27FC236}">
+                <a16:creationId xmlns:a16="http://schemas.microsoft.com/office/drawing/2014/main" id="{E36ADD05-CFDE-E76F-9F7E-4D232A89B343}"/>
+              </a:ext>
+            </a:extLst>
+          </p:cNvPr>
           <p:cNvSpPr>
             <a:spLocks noGrp="1"/>
           </p:cNvSpPr>
@@ -2002,7 +2094,13 @@
       </p:sp>
       <p:sp>
         <p:nvSpPr>
-          <p:cNvPr id="4" name="Slide Number Placeholder 3"/>
+          <p:cNvPr id="4" name="Slide Number Placeholder 3">
+            <a:extLst>
+              <a:ext uri="{FF2B5EF4-FFF2-40B4-BE49-F238E27FC236}">
+                <a16:creationId xmlns:a16="http://schemas.microsoft.com/office/drawing/2014/main" id="{85FDA6CA-2F0D-8705-EA2E-74C89FD89A3D}"/>
+              </a:ext>
+            </a:extLst>
+          </p:cNvPr>
           <p:cNvSpPr>
             <a:spLocks noGrp="1"/>
           </p:cNvSpPr>
@@ -2015,7 +2113,7 @@
           <a:bodyPr/>
           <a:lstStyle/>
           <a:p>
-            <a:fld id="{C1FF6DA9-008F-8B48-92A6-B652298478BF}" type="slidenum">
+            <a:fld id="{DD65504E-0CE5-4727-AA73-EB6D2F187A51}" type="slidenum">
               <a:rPr lang="en-US" smtClean="0"/>
               <a:t>‹#›</a:t>
             </a:fld>
@@ -2026,7 +2124,7 @@
     </p:spTree>
     <p:extLst>
       <p:ext uri="{BB962C8B-B14F-4D97-AF65-F5344CB8AC3E}">
-        <p14:creationId xmlns:p14="http://schemas.microsoft.com/office/powerpoint/2010/main" val="1212999818"/>
+        <p14:creationId xmlns:p14="http://schemas.microsoft.com/office/powerpoint/2010/main" val="2308935206"/>
       </p:ext>
     </p:extLst>
   </p:cSld>
@@ -2055,7 +2153,13 @@
       </p:grpSpPr>
       <p:sp>
         <p:nvSpPr>
-          <p:cNvPr id="2" name="Title 1"/>
+          <p:cNvPr id="2" name="Title 1">
+            <a:extLst>
+              <a:ext uri="{FF2B5EF4-FFF2-40B4-BE49-F238E27FC236}">
+                <a16:creationId xmlns:a16="http://schemas.microsoft.com/office/drawing/2014/main" id="{CEA47841-5132-DD44-516A-2B61575EB61D}"/>
+              </a:ext>
+            </a:extLst>
+          </p:cNvPr>
           <p:cNvSpPr>
             <a:spLocks noGrp="1"/>
           </p:cNvSpPr>
@@ -2065,29 +2169,34 @@
         </p:nvSpPr>
         <p:spPr>
           <a:xfrm>
-            <a:off x="457200" y="273050"/>
-            <a:ext cx="3008313" cy="1162050"/>
+            <a:off x="839788" y="457200"/>
+            <a:ext cx="3932237" cy="1600200"/>
           </a:xfrm>
         </p:spPr>
         <p:txBody>
           <a:bodyPr anchor="b"/>
           <a:lstStyle>
-            <a:lvl1pPr algn="l">
-              <a:defRPr sz="2000" b="1"/>
+            <a:lvl1pPr>
+              <a:defRPr sz="3200"/>
             </a:lvl1pPr>
           </a:lstStyle>
           <a:p>
             <a:r>
-              <a:rPr lang="en-US" smtClean="0"/>
+              <a:rPr lang="en-US"/>
               <a:t>Click to edit Master title style</a:t>
             </a:r>
-            <a:endParaRPr lang="en-US"/>
-          </a:p>
-        </p:txBody>
-      </p:sp>
-      <p:sp>
-        <p:nvSpPr>
-          <p:cNvPr id="3" name="Content Placeholder 2"/>
+          </a:p>
+        </p:txBody>
+      </p:sp>
+      <p:sp>
+        <p:nvSpPr>
+          <p:cNvPr id="3" name="Content Placeholder 2">
+            <a:extLst>
+              <a:ext uri="{FF2B5EF4-FFF2-40B4-BE49-F238E27FC236}">
+                <a16:creationId xmlns:a16="http://schemas.microsoft.com/office/drawing/2014/main" id="{7E7A4E1E-C72E-C87A-481B-F14FDBDD5004}"/>
+              </a:ext>
+            </a:extLst>
+          </p:cNvPr>
           <p:cNvSpPr>
             <a:spLocks noGrp="1"/>
           </p:cNvSpPr>
@@ -2097,8 +2206,8 @@
         </p:nvSpPr>
         <p:spPr>
           <a:xfrm>
-            <a:off x="3575050" y="273050"/>
-            <a:ext cx="5111750" cy="5853113"/>
+            <a:off x="5183188" y="987425"/>
+            <a:ext cx="6172200" cy="4873625"/>
           </a:xfrm>
         </p:spPr>
         <p:txBody>
@@ -2135,44 +2244,49 @@
           <a:p>
             <a:pPr lvl="0"/>
             <a:r>
-              <a:rPr lang="en-US" smtClean="0"/>
+              <a:rPr lang="en-US"/>
               <a:t>Click to edit Master text styles</a:t>
             </a:r>
           </a:p>
           <a:p>
             <a:pPr lvl="1"/>
             <a:r>
-              <a:rPr lang="en-US" smtClean="0"/>
+              <a:rPr lang="en-US"/>
               <a:t>Second level</a:t>
             </a:r>
           </a:p>
           <a:p>
             <a:pPr lvl="2"/>
             <a:r>
-              <a:rPr lang="en-US" smtClean="0"/>
+              <a:rPr lang="en-US"/>
               <a:t>Third level</a:t>
             </a:r>
           </a:p>
           <a:p>
             <a:pPr lvl="3"/>
             <a:r>
-              <a:rPr lang="en-US" smtClean="0"/>
+              <a:rPr lang="en-US"/>
               <a:t>Fourth level</a:t>
             </a:r>
           </a:p>
           <a:p>
             <a:pPr lvl="4"/>
             <a:r>
-              <a:rPr lang="en-US" smtClean="0"/>
+              <a:rPr lang="en-US"/>
               <a:t>Fifth level</a:t>
             </a:r>
-            <a:endParaRPr lang="en-US"/>
-          </a:p>
-        </p:txBody>
-      </p:sp>
-      <p:sp>
-        <p:nvSpPr>
-          <p:cNvPr id="4" name="Text Placeholder 3"/>
+          </a:p>
+        </p:txBody>
+      </p:sp>
+      <p:sp>
+        <p:nvSpPr>
+          <p:cNvPr id="4" name="Text Placeholder 3">
+            <a:extLst>
+              <a:ext uri="{FF2B5EF4-FFF2-40B4-BE49-F238E27FC236}">
+                <a16:creationId xmlns:a16="http://schemas.microsoft.com/office/drawing/2014/main" id="{5CC3AE56-D013-77C4-B0C9-0D6CC38F5C02}"/>
+              </a:ext>
+            </a:extLst>
+          </p:cNvPr>
           <p:cNvSpPr>
             <a:spLocks noGrp="1"/>
           </p:cNvSpPr>
@@ -2182,8 +2296,8 @@
         </p:nvSpPr>
         <p:spPr>
           <a:xfrm>
-            <a:off x="457200" y="1435100"/>
-            <a:ext cx="3008313" cy="4691063"/>
+            <a:off x="839788" y="2057400"/>
+            <a:ext cx="3932237" cy="3811588"/>
           </a:xfrm>
         </p:spPr>
         <p:txBody>
@@ -2191,68 +2305,74 @@
           <a:lstStyle>
             <a:lvl1pPr marL="0" indent="0">
               <a:buNone/>
-              <a:defRPr sz="1400"/>
+              <a:defRPr sz="1600"/>
             </a:lvl1pPr>
             <a:lvl2pPr marL="457200" indent="0">
               <a:buNone/>
-              <a:defRPr sz="1200"/>
+              <a:defRPr sz="1400"/>
             </a:lvl2pPr>
             <a:lvl3pPr marL="914400" indent="0">
               <a:buNone/>
-              <a:defRPr sz="1000"/>
+              <a:defRPr sz="1200"/>
             </a:lvl3pPr>
             <a:lvl4pPr marL="1371600" indent="0">
               <a:buNone/>
-              <a:defRPr sz="900"/>
+              <a:defRPr sz="1000"/>
             </a:lvl4pPr>
             <a:lvl5pPr marL="1828800" indent="0">
               <a:buNone/>
-              <a:defRPr sz="900"/>
+              <a:defRPr sz="1000"/>
             </a:lvl5pPr>
             <a:lvl6pPr marL="2286000" indent="0">
               <a:buNone/>
-              <a:defRPr sz="900"/>
+              <a:defRPr sz="1000"/>
             </a:lvl6pPr>
             <a:lvl7pPr marL="2743200" indent="0">
               <a:buNone/>
-              <a:defRPr sz="900"/>
+              <a:defRPr sz="1000"/>
             </a:lvl7pPr>
             <a:lvl8pPr marL="3200400" indent="0">
               <a:buNone/>
-              <a:defRPr sz="900"/>
+              <a:defRPr sz="1000"/>
             </a:lvl8pPr>
             <a:lvl9pPr marL="3657600" indent="0">
               <a:buNone/>
-              <a:defRPr sz="900"/>
+              <a:defRPr sz="1000"/>
             </a:lvl9pPr>
           </a:lstStyle>
           <a:p>
             <a:pPr lvl="0"/>
             <a:r>
+              <a:rPr lang="en-US"/>
+              <a:t>Click to edit Master text styles</a:t>
+            </a:r>
+          </a:p>
+        </p:txBody>
+      </p:sp>
+      <p:sp>
+        <p:nvSpPr>
+          <p:cNvPr id="5" name="Date Placeholder 4">
+            <a:extLst>
+              <a:ext uri="{FF2B5EF4-FFF2-40B4-BE49-F238E27FC236}">
+                <a16:creationId xmlns:a16="http://schemas.microsoft.com/office/drawing/2014/main" id="{E266550E-B8DE-DD56-6B42-B712774B8984}"/>
+              </a:ext>
+            </a:extLst>
+          </p:cNvPr>
+          <p:cNvSpPr>
+            <a:spLocks noGrp="1"/>
+          </p:cNvSpPr>
+          <p:nvPr>
+            <p:ph type="dt" sz="half" idx="10"/>
+          </p:nvPr>
+        </p:nvSpPr>
+        <p:spPr/>
+        <p:txBody>
+          <a:bodyPr/>
+          <a:lstStyle/>
+          <a:p>
+            <a:fld id="{74017AE6-BB44-43EC-A7A9-B4B79CC7F5BB}" type="datetimeFigureOut">
               <a:rPr lang="en-US" smtClean="0"/>
-              <a:t>Click to edit Master text styles</a:t>
-            </a:r>
-          </a:p>
-        </p:txBody>
-      </p:sp>
-      <p:sp>
-        <p:nvSpPr>
-          <p:cNvPr id="5" name="Date Placeholder 4"/>
-          <p:cNvSpPr>
-            <a:spLocks noGrp="1"/>
-          </p:cNvSpPr>
-          <p:nvPr>
-            <p:ph type="dt" sz="half" idx="10"/>
-          </p:nvPr>
-        </p:nvSpPr>
-        <p:spPr/>
-        <p:txBody>
-          <a:bodyPr/>
-          <a:lstStyle/>
-          <a:p>
-            <a:fld id="{5BCAD085-E8A6-8845-BD4E-CB4CCA059FC4}" type="datetimeFigureOut">
-              <a:rPr lang="en-US" smtClean="0"/>
-              <a:t>1/27/13</a:t>
+              <a:t>7/18/2026</a:t>
             </a:fld>
             <a:endParaRPr lang="en-US"/>
           </a:p>
@@ -2260,7 +2380,13 @@
       </p:sp>
       <p:sp>
         <p:nvSpPr>
-          <p:cNvPr id="6" name="Footer Placeholder 5"/>
+          <p:cNvPr id="6" name="Footer Placeholder 5">
+            <a:extLst>
+              <a:ext uri="{FF2B5EF4-FFF2-40B4-BE49-F238E27FC236}">
+                <a16:creationId xmlns:a16="http://schemas.microsoft.com/office/drawing/2014/main" id="{C450DAFA-9C0B-60C7-6A8A-C62D13222C05}"/>
+              </a:ext>
+            </a:extLst>
+          </p:cNvPr>
           <p:cNvSpPr>
             <a:spLocks noGrp="1"/>
           </p:cNvSpPr>
@@ -2279,7 +2405,13 @@
       </p:sp>
       <p:sp>
         <p:nvSpPr>
-          <p:cNvPr id="7" name="Slide Number Placeholder 6"/>
+          <p:cNvPr id="7" name="Slide Number Placeholder 6">
+            <a:extLst>
+              <a:ext uri="{FF2B5EF4-FFF2-40B4-BE49-F238E27FC236}">
+                <a16:creationId xmlns:a16="http://schemas.microsoft.com/office/drawing/2014/main" id="{48DD7902-EE80-700F-994B-93C076C3CFED}"/>
+              </a:ext>
+            </a:extLst>
+          </p:cNvPr>
           <p:cNvSpPr>
             <a:spLocks noGrp="1"/>
           </p:cNvSpPr>
@@ -2292,7 +2424,7 @@
           <a:bodyPr/>
           <a:lstStyle/>
           <a:p>
-            <a:fld id="{C1FF6DA9-008F-8B48-92A6-B652298478BF}" type="slidenum">
+            <a:fld id="{DD65504E-0CE5-4727-AA73-EB6D2F187A51}" type="slidenum">
               <a:rPr lang="en-US" smtClean="0"/>
               <a:t>‹#›</a:t>
             </a:fld>
@@ -2303,7 +2435,7 @@
     </p:spTree>
     <p:extLst>
       <p:ext uri="{BB962C8B-B14F-4D97-AF65-F5344CB8AC3E}">
-        <p14:creationId xmlns:p14="http://schemas.microsoft.com/office/powerpoint/2010/main" val="1840726560"/>
+        <p14:creationId xmlns:p14="http://schemas.microsoft.com/office/powerpoint/2010/main" val="3086553756"/>
       </p:ext>
     </p:extLst>
   </p:cSld>
@@ -2332,7 +2464,13 @@
       </p:grpSpPr>
       <p:sp>
         <p:nvSpPr>
-          <p:cNvPr id="2" name="Title 1"/>
+          <p:cNvPr id="2" name="Title 1">
+            <a:extLst>
+              <a:ext uri="{FF2B5EF4-FFF2-40B4-BE49-F238E27FC236}">
+                <a16:creationId xmlns:a16="http://schemas.microsoft.com/office/drawing/2014/main" id="{D9B01606-94D5-122C-51A6-4A97AC95BC58}"/>
+              </a:ext>
+            </a:extLst>
+          </p:cNvPr>
           <p:cNvSpPr>
             <a:spLocks noGrp="1"/>
           </p:cNvSpPr>
@@ -2342,29 +2480,34 @@
         </p:nvSpPr>
         <p:spPr>
           <a:xfrm>
-            <a:off x="1792288" y="4800600"/>
-            <a:ext cx="5486400" cy="566738"/>
+            <a:off x="839788" y="457200"/>
+            <a:ext cx="3932237" cy="1600200"/>
           </a:xfrm>
         </p:spPr>
         <p:txBody>
           <a:bodyPr anchor="b"/>
           <a:lstStyle>
-            <a:lvl1pPr algn="l">
-              <a:defRPr sz="2000" b="1"/>
+            <a:lvl1pPr>
+              <a:defRPr sz="3200"/>
             </a:lvl1pPr>
           </a:lstStyle>
           <a:p>
             <a:r>
-              <a:rPr lang="en-US" smtClean="0"/>
+              <a:rPr lang="en-US"/>
               <a:t>Click to edit Master title style</a:t>
             </a:r>
-            <a:endParaRPr lang="en-US"/>
-          </a:p>
-        </p:txBody>
-      </p:sp>
-      <p:sp>
-        <p:nvSpPr>
-          <p:cNvPr id="3" name="Picture Placeholder 2"/>
+          </a:p>
+        </p:txBody>
+      </p:sp>
+      <p:sp>
+        <p:nvSpPr>
+          <p:cNvPr id="3" name="Picture Placeholder 2">
+            <a:extLst>
+              <a:ext uri="{FF2B5EF4-FFF2-40B4-BE49-F238E27FC236}">
+                <a16:creationId xmlns:a16="http://schemas.microsoft.com/office/drawing/2014/main" id="{7A78CD61-8E81-EA0E-F64F-B1C40F1E78E4}"/>
+              </a:ext>
+            </a:extLst>
+          </p:cNvPr>
           <p:cNvSpPr>
             <a:spLocks noGrp="1"/>
           </p:cNvSpPr>
@@ -2374,8 +2517,8 @@
         </p:nvSpPr>
         <p:spPr>
           <a:xfrm>
-            <a:off x="1792288" y="612775"/>
-            <a:ext cx="5486400" cy="4114800"/>
+            <a:off x="5183188" y="987425"/>
+            <a:ext cx="6172200" cy="4873625"/>
           </a:xfrm>
         </p:spPr>
         <p:txBody>
@@ -2425,7 +2568,13 @@
       </p:sp>
       <p:sp>
         <p:nvSpPr>
-          <p:cNvPr id="4" name="Text Placeholder 3"/>
+          <p:cNvPr id="4" name="Text Placeholder 3">
+            <a:extLst>
+              <a:ext uri="{FF2B5EF4-FFF2-40B4-BE49-F238E27FC236}">
+                <a16:creationId xmlns:a16="http://schemas.microsoft.com/office/drawing/2014/main" id="{2860E0B6-2B33-738E-4056-E87DF30AB71F}"/>
+              </a:ext>
+            </a:extLst>
+          </p:cNvPr>
           <p:cNvSpPr>
             <a:spLocks noGrp="1"/>
           </p:cNvSpPr>
@@ -2435,8 +2584,8 @@
         </p:nvSpPr>
         <p:spPr>
           <a:xfrm>
-            <a:off x="1792288" y="5367338"/>
-            <a:ext cx="5486400" cy="804862"/>
+            <a:off x="839788" y="2057400"/>
+            <a:ext cx="3932237" cy="3811588"/>
           </a:xfrm>
         </p:spPr>
         <p:txBody>
@@ -2444,68 +2593,74 @@
           <a:lstStyle>
             <a:lvl1pPr marL="0" indent="0">
               <a:buNone/>
-              <a:defRPr sz="1400"/>
+              <a:defRPr sz="1600"/>
             </a:lvl1pPr>
             <a:lvl2pPr marL="457200" indent="0">
               <a:buNone/>
-              <a:defRPr sz="1200"/>
+              <a:defRPr sz="1400"/>
             </a:lvl2pPr>
             <a:lvl3pPr marL="914400" indent="0">
               <a:buNone/>
-              <a:defRPr sz="1000"/>
+              <a:defRPr sz="1200"/>
             </a:lvl3pPr>
             <a:lvl4pPr marL="1371600" indent="0">
               <a:buNone/>
-              <a:defRPr sz="900"/>
+              <a:defRPr sz="1000"/>
             </a:lvl4pPr>
             <a:lvl5pPr marL="1828800" indent="0">
               <a:buNone/>
-              <a:defRPr sz="900"/>
+              <a:defRPr sz="1000"/>
             </a:lvl5pPr>
             <a:lvl6pPr marL="2286000" indent="0">
               <a:buNone/>
-              <a:defRPr sz="900"/>
+              <a:defRPr sz="1000"/>
             </a:lvl6pPr>
             <a:lvl7pPr marL="2743200" indent="0">
               <a:buNone/>
-              <a:defRPr sz="900"/>
+              <a:defRPr sz="1000"/>
             </a:lvl7pPr>
             <a:lvl8pPr marL="3200400" indent="0">
               <a:buNone/>
-              <a:defRPr sz="900"/>
+              <a:defRPr sz="1000"/>
             </a:lvl8pPr>
             <a:lvl9pPr marL="3657600" indent="0">
               <a:buNone/>
-              <a:defRPr sz="900"/>
+              <a:defRPr sz="1000"/>
             </a:lvl9pPr>
           </a:lstStyle>
           <a:p>
             <a:pPr lvl="0"/>
             <a:r>
+              <a:rPr lang="en-US"/>
+              <a:t>Click to edit Master text styles</a:t>
+            </a:r>
+          </a:p>
+        </p:txBody>
+      </p:sp>
+      <p:sp>
+        <p:nvSpPr>
+          <p:cNvPr id="5" name="Date Placeholder 4">
+            <a:extLst>
+              <a:ext uri="{FF2B5EF4-FFF2-40B4-BE49-F238E27FC236}">
+                <a16:creationId xmlns:a16="http://schemas.microsoft.com/office/drawing/2014/main" id="{8DE5814C-4FE5-D64E-185F-9924322C7394}"/>
+              </a:ext>
+            </a:extLst>
+          </p:cNvPr>
+          <p:cNvSpPr>
+            <a:spLocks noGrp="1"/>
+          </p:cNvSpPr>
+          <p:nvPr>
+            <p:ph type="dt" sz="half" idx="10"/>
+          </p:nvPr>
+        </p:nvSpPr>
+        <p:spPr/>
+        <p:txBody>
+          <a:bodyPr/>
+          <a:lstStyle/>
+          <a:p>
+            <a:fld id="{74017AE6-BB44-43EC-A7A9-B4B79CC7F5BB}" type="datetimeFigureOut">
               <a:rPr lang="en-US" smtClean="0"/>
-              <a:t>Click to edit Master text styles</a:t>
-            </a:r>
-          </a:p>
-        </p:txBody>
-      </p:sp>
-      <p:sp>
-        <p:nvSpPr>
-          <p:cNvPr id="5" name="Date Placeholder 4"/>
-          <p:cNvSpPr>
-            <a:spLocks noGrp="1"/>
-          </p:cNvSpPr>
-          <p:nvPr>
-            <p:ph type="dt" sz="half" idx="10"/>
-          </p:nvPr>
-        </p:nvSpPr>
-        <p:spPr/>
-        <p:txBody>
-          <a:bodyPr/>
-          <a:lstStyle/>
-          <a:p>
-            <a:fld id="{5BCAD085-E8A6-8845-BD4E-CB4CCA059FC4}" type="datetimeFigureOut">
-              <a:rPr lang="en-US" smtClean="0"/>
-              <a:t>1/27/13</a:t>
+              <a:t>7/18/2026</a:t>
             </a:fld>
             <a:endParaRPr lang="en-US"/>
           </a:p>
@@ -2513,7 +2668,13 @@
       </p:sp>
       <p:sp>
         <p:nvSpPr>
-          <p:cNvPr id="6" name="Footer Placeholder 5"/>
+          <p:cNvPr id="6" name="Footer Placeholder 5">
+            <a:extLst>
+              <a:ext uri="{FF2B5EF4-FFF2-40B4-BE49-F238E27FC236}">
+                <a16:creationId xmlns:a16="http://schemas.microsoft.com/office/drawing/2014/main" id="{430E32C6-5BBF-2F17-6EBA-74985D3DE01C}"/>
+              </a:ext>
+            </a:extLst>
+          </p:cNvPr>
           <p:cNvSpPr>
             <a:spLocks noGrp="1"/>
           </p:cNvSpPr>
@@ -2532,7 +2693,13 @@
       </p:sp>
       <p:sp>
         <p:nvSpPr>
-          <p:cNvPr id="7" name="Slide Number Placeholder 6"/>
+          <p:cNvPr id="7" name="Slide Number Placeholder 6">
+            <a:extLst>
+              <a:ext uri="{FF2B5EF4-FFF2-40B4-BE49-F238E27FC236}">
+                <a16:creationId xmlns:a16="http://schemas.microsoft.com/office/drawing/2014/main" id="{F0317016-2AD0-BE6C-601D-C6708CD2381D}"/>
+              </a:ext>
+            </a:extLst>
+          </p:cNvPr>
           <p:cNvSpPr>
             <a:spLocks noGrp="1"/>
           </p:cNvSpPr>
@@ -2545,7 +2712,7 @@
           <a:bodyPr/>
           <a:lstStyle/>
           <a:p>
-            <a:fld id="{C1FF6DA9-008F-8B48-92A6-B652298478BF}" type="slidenum">
+            <a:fld id="{DD65504E-0CE5-4727-AA73-EB6D2F187A51}" type="slidenum">
               <a:rPr lang="en-US" smtClean="0"/>
               <a:t>‹#›</a:t>
             </a:fld>
@@ -2556,7 +2723,7 @@
     </p:spTree>
     <p:extLst>
       <p:ext uri="{BB962C8B-B14F-4D97-AF65-F5344CB8AC3E}">
-        <p14:creationId xmlns:p14="http://schemas.microsoft.com/office/powerpoint/2010/main" val="3889236939"/>
+        <p14:creationId xmlns:p14="http://schemas.microsoft.com/office/powerpoint/2010/main" val="3741741708"/>
       </p:ext>
     </p:extLst>
   </p:cSld>
@@ -2590,7 +2757,13 @@
       </p:grpSpPr>
       <p:sp>
         <p:nvSpPr>
-          <p:cNvPr id="2" name="Title Placeholder 1"/>
+          <p:cNvPr id="2" name="Title Placeholder 1">
+            <a:extLst>
+              <a:ext uri="{FF2B5EF4-FFF2-40B4-BE49-F238E27FC236}">
+                <a16:creationId xmlns:a16="http://schemas.microsoft.com/office/drawing/2014/main" id="{7B2CF0C1-4952-FB55-547C-6BAD74C0BB46}"/>
+              </a:ext>
+            </a:extLst>
+          </p:cNvPr>
           <p:cNvSpPr>
             <a:spLocks noGrp="1"/>
           </p:cNvSpPr>
@@ -2600,8 +2773,8 @@
         </p:nvSpPr>
         <p:spPr>
           <a:xfrm>
-            <a:off x="457200" y="274638"/>
-            <a:ext cx="8229600" cy="1143000"/>
+            <a:off x="838200" y="365125"/>
+            <a:ext cx="10515600" cy="1325563"/>
           </a:xfrm>
           <a:prstGeom prst="rect">
             <a:avLst/>
@@ -2614,16 +2787,21 @@
           <a:lstStyle/>
           <a:p>
             <a:r>
-              <a:rPr lang="en-US" smtClean="0"/>
+              <a:rPr lang="en-US"/>
               <a:t>Click to edit Master title style</a:t>
             </a:r>
-            <a:endParaRPr lang="en-US"/>
-          </a:p>
-        </p:txBody>
-      </p:sp>
-      <p:sp>
-        <p:nvSpPr>
-          <p:cNvPr id="3" name="Text Placeholder 2"/>
+          </a:p>
+        </p:txBody>
+      </p:sp>
+      <p:sp>
+        <p:nvSpPr>
+          <p:cNvPr id="3" name="Text Placeholder 2">
+            <a:extLst>
+              <a:ext uri="{FF2B5EF4-FFF2-40B4-BE49-F238E27FC236}">
+                <a16:creationId xmlns:a16="http://schemas.microsoft.com/office/drawing/2014/main" id="{5E24BF88-47F4-7225-5766-7AAEA4C6579B}"/>
+              </a:ext>
+            </a:extLst>
+          </p:cNvPr>
           <p:cNvSpPr>
             <a:spLocks noGrp="1"/>
           </p:cNvSpPr>
@@ -2633,8 +2811,8 @@
         </p:nvSpPr>
         <p:spPr>
           <a:xfrm>
-            <a:off x="457200" y="1600200"/>
-            <a:ext cx="8229600" cy="4525963"/>
+            <a:off x="838200" y="1825625"/>
+            <a:ext cx="10515600" cy="4351338"/>
           </a:xfrm>
           <a:prstGeom prst="rect">
             <a:avLst/>
@@ -2648,44 +2826,49 @@
           <a:p>
             <a:pPr lvl="0"/>
             <a:r>
-              <a:rPr lang="en-US" smtClean="0"/>
+              <a:rPr lang="en-US"/>
               <a:t>Click to edit Master text styles</a:t>
             </a:r>
           </a:p>
           <a:p>
             <a:pPr lvl="1"/>
             <a:r>
-              <a:rPr lang="en-US" smtClean="0"/>
+              <a:rPr lang="en-US"/>
               <a:t>Second level</a:t>
             </a:r>
           </a:p>
           <a:p>
             <a:pPr lvl="2"/>
             <a:r>
-              <a:rPr lang="en-US" smtClean="0"/>
+              <a:rPr lang="en-US"/>
               <a:t>Third level</a:t>
             </a:r>
           </a:p>
           <a:p>
             <a:pPr lvl="3"/>
             <a:r>
-              <a:rPr lang="en-US" smtClean="0"/>
+              <a:rPr lang="en-US"/>
               <a:t>Fourth level</a:t>
             </a:r>
           </a:p>
           <a:p>
             <a:pPr lvl="4"/>
             <a:r>
-              <a:rPr lang="en-US" smtClean="0"/>
+              <a:rPr lang="en-US"/>
               <a:t>Fifth level</a:t>
             </a:r>
-            <a:endParaRPr lang="en-US"/>
-          </a:p>
-        </p:txBody>
-      </p:sp>
-      <p:sp>
-        <p:nvSpPr>
-          <p:cNvPr id="4" name="Date Placeholder 3"/>
+          </a:p>
+        </p:txBody>
+      </p:sp>
+      <p:sp>
+        <p:nvSpPr>
+          <p:cNvPr id="4" name="Date Placeholder 3">
+            <a:extLst>
+              <a:ext uri="{FF2B5EF4-FFF2-40B4-BE49-F238E27FC236}">
+                <a16:creationId xmlns:a16="http://schemas.microsoft.com/office/drawing/2014/main" id="{146657E0-5913-BFA6-1F8A-221B3833E2B0}"/>
+              </a:ext>
+            </a:extLst>
+          </p:cNvPr>
           <p:cNvSpPr>
             <a:spLocks noGrp="1"/>
           </p:cNvSpPr>
@@ -2695,8 +2878,8 @@
         </p:nvSpPr>
         <p:spPr>
           <a:xfrm>
-            <a:off x="457200" y="6356350"/>
-            <a:ext cx="2133600" cy="365125"/>
+            <a:off x="838200" y="6356350"/>
+            <a:ext cx="2743200" cy="365125"/>
           </a:xfrm>
           <a:prstGeom prst="rect">
             <a:avLst/>
@@ -2709,16 +2892,16 @@
               <a:defRPr sz="1200">
                 <a:solidFill>
                   <a:schemeClr val="tx1">
-                    <a:tint val="75000"/>
+                    <a:tint val="82000"/>
                   </a:schemeClr>
                 </a:solidFill>
               </a:defRPr>
             </a:lvl1pPr>
           </a:lstStyle>
           <a:p>
-            <a:fld id="{5BCAD085-E8A6-8845-BD4E-CB4CCA059FC4}" type="datetimeFigureOut">
+            <a:fld id="{74017AE6-BB44-43EC-A7A9-B4B79CC7F5BB}" type="datetimeFigureOut">
               <a:rPr lang="en-US" smtClean="0"/>
-              <a:t>1/27/13</a:t>
+              <a:t>7/18/2026</a:t>
             </a:fld>
             <a:endParaRPr lang="en-US"/>
           </a:p>
@@ -2726,7 +2909,13 @@
       </p:sp>
       <p:sp>
         <p:nvSpPr>
-          <p:cNvPr id="5" name="Footer Placeholder 4"/>
+          <p:cNvPr id="5" name="Footer Placeholder 4">
+            <a:extLst>
+              <a:ext uri="{FF2B5EF4-FFF2-40B4-BE49-F238E27FC236}">
+                <a16:creationId xmlns:a16="http://schemas.microsoft.com/office/drawing/2014/main" id="{DAEA9924-ABAB-0289-D398-9BD7037FBE29}"/>
+              </a:ext>
+            </a:extLst>
+          </p:cNvPr>
           <p:cNvSpPr>
             <a:spLocks noGrp="1"/>
           </p:cNvSpPr>
@@ -2736,8 +2925,8 @@
         </p:nvSpPr>
         <p:spPr>
           <a:xfrm>
-            <a:off x="3124200" y="6356350"/>
-            <a:ext cx="2895600" cy="365125"/>
+            <a:off x="4038600" y="6356350"/>
+            <a:ext cx="4114800" cy="365125"/>
           </a:xfrm>
           <a:prstGeom prst="rect">
             <a:avLst/>
@@ -2750,7 +2939,7 @@
               <a:defRPr sz="1200">
                 <a:solidFill>
                   <a:schemeClr val="tx1">
-                    <a:tint val="75000"/>
+                    <a:tint val="82000"/>
                   </a:schemeClr>
                 </a:solidFill>
               </a:defRPr>
@@ -2763,7 +2952,13 @@
       </p:sp>
       <p:sp>
         <p:nvSpPr>
-          <p:cNvPr id="6" name="Slide Number Placeholder 5"/>
+          <p:cNvPr id="6" name="Slide Number Placeholder 5">
+            <a:extLst>
+              <a:ext uri="{FF2B5EF4-FFF2-40B4-BE49-F238E27FC236}">
+                <a16:creationId xmlns:a16="http://schemas.microsoft.com/office/drawing/2014/main" id="{B050EECF-FB5E-950F-C0A9-AB21C6C43DD2}"/>
+              </a:ext>
+            </a:extLst>
+          </p:cNvPr>
           <p:cNvSpPr>
             <a:spLocks noGrp="1"/>
           </p:cNvSpPr>
@@ -2773,8 +2968,8 @@
         </p:nvSpPr>
         <p:spPr>
           <a:xfrm>
-            <a:off x="6553200" y="6356350"/>
-            <a:ext cx="2133600" cy="365125"/>
+            <a:off x="8610600" y="6356350"/>
+            <a:ext cx="2743200" cy="365125"/>
           </a:xfrm>
           <a:prstGeom prst="rect">
             <a:avLst/>
@@ -2787,14 +2982,14 @@
               <a:defRPr sz="1200">
                 <a:solidFill>
                   <a:schemeClr val="tx1">
-                    <a:tint val="75000"/>
+                    <a:tint val="82000"/>
                   </a:schemeClr>
                 </a:solidFill>
               </a:defRPr>
             </a:lvl1pPr>
           </a:lstStyle>
           <a:p>
-            <a:fld id="{C1FF6DA9-008F-8B48-92A6-B652298478BF}" type="slidenum">
+            <a:fld id="{DD65504E-0CE5-4727-AA73-EB6D2F187A51}" type="slidenum">
               <a:rPr lang="en-US" smtClean="0"/>
               <a:t>‹#›</a:t>
             </a:fld>
@@ -2805,7 +3000,7 @@
     </p:spTree>
     <p:extLst>
       <p:ext uri="{BB962C8B-B14F-4D97-AF65-F5344CB8AC3E}">
-        <p14:creationId xmlns:p14="http://schemas.microsoft.com/office/powerpoint/2010/main" val="2209977519"/>
+        <p14:creationId xmlns:p14="http://schemas.microsoft.com/office/powerpoint/2010/main" val="3059216225"/>
       </p:ext>
     </p:extLst>
   </p:cSld>
@@ -2825,7 +3020,10 @@
   </p:sldLayoutIdLst>
   <p:txStyles>
     <p:titleStyle>
-      <a:lvl1pPr algn="ctr" defTabSz="457200" rtl="0" eaLnBrk="1" latinLnBrk="0" hangingPunct="1">
+      <a:lvl1pPr algn="l" defTabSz="914400" rtl="0" eaLnBrk="1" latinLnBrk="0" hangingPunct="1">
+        <a:lnSpc>
+          <a:spcPct val="90000"/>
+        </a:lnSpc>
         <a:spcBef>
           <a:spcPct val="0"/>
         </a:spcBef>
@@ -2841,13 +3039,16 @@
       </a:lvl1pPr>
     </p:titleStyle>
     <p:bodyStyle>
-      <a:lvl1pPr marL="342900" indent="-342900" algn="l" defTabSz="457200" rtl="0" eaLnBrk="1" latinLnBrk="0" hangingPunct="1">
+      <a:lvl1pPr marL="228600" indent="-228600" algn="l" defTabSz="914400" rtl="0" eaLnBrk="1" latinLnBrk="0" hangingPunct="1">
+        <a:lnSpc>
+          <a:spcPct val="90000"/>
+        </a:lnSpc>
         <a:spcBef>
-          <a:spcPct val="20000"/>
+          <a:spcPts val="1000"/>
         </a:spcBef>
-        <a:buFont typeface="Arial"/>
+        <a:buFont typeface="Arial" panose="020B0604020202020204" pitchFamily="34" charset="0"/>
         <a:buChar char="•"/>
-        <a:defRPr sz="3200" kern="1200">
+        <a:defRPr sz="2800" kern="1200">
           <a:solidFill>
             <a:schemeClr val="tx1"/>
           </a:solidFill>
@@ -2856,26 +3057,14 @@
           <a:cs typeface="+mn-cs"/>
         </a:defRPr>
       </a:lvl1pPr>
-      <a:lvl2pPr marL="742950" indent="-285750" algn="l" defTabSz="457200" rtl="0" eaLnBrk="1" latinLnBrk="0" hangingPunct="1">
+      <a:lvl2pPr marL="685800" indent="-228600" algn="l" defTabSz="914400" rtl="0" eaLnBrk="1" latinLnBrk="0" hangingPunct="1">
+        <a:lnSpc>
+          <a:spcPct val="90000"/>
+        </a:lnSpc>
         <a:spcBef>
-          <a:spcPct val="20000"/>
+          <a:spcPts val="500"/>
         </a:spcBef>
-        <a:buFont typeface="Arial"/>
-        <a:buChar char="–"/>
-        <a:defRPr sz="2800" kern="1200">
-          <a:solidFill>
-            <a:schemeClr val="tx1"/>
-          </a:solidFill>
-          <a:latin typeface="+mn-lt"/>
-          <a:ea typeface="+mn-ea"/>
-          <a:cs typeface="+mn-cs"/>
-        </a:defRPr>
-      </a:lvl2pPr>
-      <a:lvl3pPr marL="1143000" indent="-228600" algn="l" defTabSz="457200" rtl="0" eaLnBrk="1" latinLnBrk="0" hangingPunct="1">
-        <a:spcBef>
-          <a:spcPct val="20000"/>
-        </a:spcBef>
-        <a:buFont typeface="Arial"/>
+        <a:buFont typeface="Arial" panose="020B0604020202020204" pitchFamily="34" charset="0"/>
         <a:buChar char="•"/>
         <a:defRPr sz="2400" kern="1200">
           <a:solidFill>
@@ -2885,42 +3074,15 @@
           <a:ea typeface="+mn-ea"/>
           <a:cs typeface="+mn-cs"/>
         </a:defRPr>
-      </a:lvl3pPr>
-      <a:lvl4pPr marL="1600200" indent="-228600" algn="l" defTabSz="457200" rtl="0" eaLnBrk="1" latinLnBrk="0" hangingPunct="1">
+      </a:lvl2pPr>
+      <a:lvl3pPr marL="1143000" indent="-228600" algn="l" defTabSz="914400" rtl="0" eaLnBrk="1" latinLnBrk="0" hangingPunct="1">
+        <a:lnSpc>
+          <a:spcPct val="90000"/>
+        </a:lnSpc>
         <a:spcBef>
-          <a:spcPct val="20000"/>
+          <a:spcPts val="500"/>
         </a:spcBef>
-        <a:buFont typeface="Arial"/>
-        <a:buChar char="–"/>
-        <a:defRPr sz="2000" kern="1200">
-          <a:solidFill>
-            <a:schemeClr val="tx1"/>
-          </a:solidFill>
-          <a:latin typeface="+mn-lt"/>
-          <a:ea typeface="+mn-ea"/>
-          <a:cs typeface="+mn-cs"/>
-        </a:defRPr>
-      </a:lvl4pPr>
-      <a:lvl5pPr marL="2057400" indent="-228600" algn="l" defTabSz="457200" rtl="0" eaLnBrk="1" latinLnBrk="0" hangingPunct="1">
-        <a:spcBef>
-          <a:spcPct val="20000"/>
-        </a:spcBef>
-        <a:buFont typeface="Arial"/>
-        <a:buChar char="»"/>
-        <a:defRPr sz="2000" kern="1200">
-          <a:solidFill>
-            <a:schemeClr val="tx1"/>
-          </a:solidFill>
-          <a:latin typeface="+mn-lt"/>
-          <a:ea typeface="+mn-ea"/>
-          <a:cs typeface="+mn-cs"/>
-        </a:defRPr>
-      </a:lvl5pPr>
-      <a:lvl6pPr marL="2514600" indent="-228600" algn="l" defTabSz="457200" rtl="0" eaLnBrk="1" latinLnBrk="0" hangingPunct="1">
-        <a:spcBef>
-          <a:spcPct val="20000"/>
-        </a:spcBef>
-        <a:buFont typeface="Arial"/>
+        <a:buFont typeface="Arial" panose="020B0604020202020204" pitchFamily="34" charset="0"/>
         <a:buChar char="•"/>
         <a:defRPr sz="2000" kern="1200">
           <a:solidFill>
@@ -2930,14 +3092,71 @@
           <a:ea typeface="+mn-ea"/>
           <a:cs typeface="+mn-cs"/>
         </a:defRPr>
+      </a:lvl3pPr>
+      <a:lvl4pPr marL="1600200" indent="-228600" algn="l" defTabSz="914400" rtl="0" eaLnBrk="1" latinLnBrk="0" hangingPunct="1">
+        <a:lnSpc>
+          <a:spcPct val="90000"/>
+        </a:lnSpc>
+        <a:spcBef>
+          <a:spcPts val="500"/>
+        </a:spcBef>
+        <a:buFont typeface="Arial" panose="020B0604020202020204" pitchFamily="34" charset="0"/>
+        <a:buChar char="•"/>
+        <a:defRPr sz="1800" kern="1200">
+          <a:solidFill>
+            <a:schemeClr val="tx1"/>
+          </a:solidFill>
+          <a:latin typeface="+mn-lt"/>
+          <a:ea typeface="+mn-ea"/>
+          <a:cs typeface="+mn-cs"/>
+        </a:defRPr>
+      </a:lvl4pPr>
+      <a:lvl5pPr marL="2057400" indent="-228600" algn="l" defTabSz="914400" rtl="0" eaLnBrk="1" latinLnBrk="0" hangingPunct="1">
+        <a:lnSpc>
+          <a:spcPct val="90000"/>
+        </a:lnSpc>
+        <a:spcBef>
+          <a:spcPts val="500"/>
+        </a:spcBef>
+        <a:buFont typeface="Arial" panose="020B0604020202020204" pitchFamily="34" charset="0"/>
+        <a:buChar char="•"/>
+        <a:defRPr sz="1800" kern="1200">
+          <a:solidFill>
+            <a:schemeClr val="tx1"/>
+          </a:solidFill>
+          <a:latin typeface="+mn-lt"/>
+          <a:ea typeface="+mn-ea"/>
+          <a:cs typeface="+mn-cs"/>
+        </a:defRPr>
+      </a:lvl5pPr>
+      <a:lvl6pPr marL="2514600" indent="-228600" algn="l" defTabSz="914400" rtl="0" eaLnBrk="1" latinLnBrk="0" hangingPunct="1">
+        <a:lnSpc>
+          <a:spcPct val="90000"/>
+        </a:lnSpc>
+        <a:spcBef>
+          <a:spcPts val="500"/>
+        </a:spcBef>
+        <a:buFont typeface="Arial" panose="020B0604020202020204" pitchFamily="34" charset="0"/>
+        <a:buChar char="•"/>
+        <a:defRPr sz="1800" kern="1200">
+          <a:solidFill>
+            <a:schemeClr val="tx1"/>
+          </a:solidFill>
+          <a:latin typeface="+mn-lt"/>
+          <a:ea typeface="+mn-ea"/>
+          <a:cs typeface="+mn-cs"/>
+        </a:defRPr>
       </a:lvl6pPr>
-      <a:lvl7pPr marL="2971800" indent="-228600" algn="l" defTabSz="457200" rtl="0" eaLnBrk="1" latinLnBrk="0" hangingPunct="1">
+      <a:lvl7pPr marL="2971800" indent="-228600" algn="l" defTabSz="914400" rtl="0" eaLnBrk="1" latinLnBrk="0" hangingPunct="1">
+        <a:lnSpc>
+          <a:spcPct val="90000"/>
+        </a:lnSpc>
         <a:spcBef>
-          <a:spcPct val="20000"/>
+          <a:spcPts val="500"/>
         </a:spcBef>
-        <a:buFont typeface="Arial"/>
+        <a:buFont typeface="Arial" panose="020B0604020202020204" pitchFamily="34" charset="0"/>
         <a:buChar char="•"/>
-        <a:defRPr sz="2000" kern="1200">
+        <a:defRPr sz="1800" kern="1200">
           <a:solidFill>
             <a:schemeClr val="tx1"/>
           </a:solidFill>
@@ -2946,13 +3165,16 @@
           <a:cs typeface="+mn-cs"/>
         </a:defRPr>
       </a:lvl7pPr>
-      <a:lvl8pPr marL="3429000" indent="-228600" algn="l" defTabSz="457200" rtl="0" eaLnBrk="1" latinLnBrk="0" hangingPunct="1">
+      <a:lvl8pPr marL="3429000" indent="-228600" algn="l" defTabSz="914400" rtl="0" eaLnBrk="1" latinLnBrk="0" hangingPunct="1">
+        <a:lnSpc>
+          <a:spcPct val="90000"/>
+        </a:lnSpc>
         <a:spcBef>
-          <a:spcPct val="20000"/>
+          <a:spcPts val="500"/>
         </a:spcBef>
-        <a:buFont typeface="Arial"/>
+        <a:buFont typeface="Arial" panose="020B0604020202020204" pitchFamily="34" charset="0"/>
         <a:buChar char="•"/>
-        <a:defRPr sz="2000" kern="1200">
+        <a:defRPr sz="1800" kern="1200">
           <a:solidFill>
             <a:schemeClr val="tx1"/>
           </a:solidFill>
@@ -2961,13 +3183,16 @@
           <a:cs typeface="+mn-cs"/>
         </a:defRPr>
       </a:lvl8pPr>
-      <a:lvl9pPr marL="3886200" indent="-228600" algn="l" defTabSz="457200" rtl="0" eaLnBrk="1" latinLnBrk="0" hangingPunct="1">
+      <a:lvl9pPr marL="3886200" indent="-228600" algn="l" defTabSz="914400" rtl="0" eaLnBrk="1" latinLnBrk="0" hangingPunct="1">
+        <a:lnSpc>
+          <a:spcPct val="90000"/>
+        </a:lnSpc>
         <a:spcBef>
-          <a:spcPct val="20000"/>
+          <a:spcPts val="500"/>
         </a:spcBef>
-        <a:buFont typeface="Arial"/>
+        <a:buFont typeface="Arial" panose="020B0604020202020204" pitchFamily="34" charset="0"/>
         <a:buChar char="•"/>
-        <a:defRPr sz="2000" kern="1200">
+        <a:defRPr sz="1800" kern="1200">
           <a:solidFill>
             <a:schemeClr val="tx1"/>
           </a:solidFill>
@@ -2981,7 +3206,7 @@
       <a:defPPr>
         <a:defRPr lang="en-US"/>
       </a:defPPr>
-      <a:lvl1pPr marL="0" algn="l" defTabSz="457200" rtl="0" eaLnBrk="1" latinLnBrk="0" hangingPunct="1">
+      <a:lvl1pPr marL="0" algn="l" defTabSz="914400" rtl="0" eaLnBrk="1" latinLnBrk="0" hangingPunct="1">
         <a:defRPr sz="1800" kern="1200">
           <a:solidFill>
             <a:schemeClr val="tx1"/>
@@ -2991,7 +3216,7 @@
           <a:cs typeface="+mn-cs"/>
         </a:defRPr>
       </a:lvl1pPr>
-      <a:lvl2pPr marL="457200" algn="l" defTabSz="457200" rtl="0" eaLnBrk="1" latinLnBrk="0" hangingPunct="1">
+      <a:lvl2pPr marL="457200" algn="l" defTabSz="914400" rtl="0" eaLnBrk="1" latinLnBrk="0" hangingPunct="1">
         <a:defRPr sz="1800" kern="1200">
           <a:solidFill>
             <a:schemeClr val="tx1"/>
@@ -3001,7 +3226,7 @@
           <a:cs typeface="+mn-cs"/>
         </a:defRPr>
       </a:lvl2pPr>
-      <a:lvl3pPr marL="914400" algn="l" defTabSz="457200" rtl="0" eaLnBrk="1" latinLnBrk="0" hangingPunct="1">
+      <a:lvl3pPr marL="914400" algn="l" defTabSz="914400" rtl="0" eaLnBrk="1" latinLnBrk="0" hangingPunct="1">
         <a:defRPr sz="1800" kern="1200">
           <a:solidFill>
             <a:schemeClr val="tx1"/>
@@ -3011,7 +3236,7 @@
           <a:cs typeface="+mn-cs"/>
         </a:defRPr>
       </a:lvl3pPr>
-      <a:lvl4pPr marL="1371600" algn="l" defTabSz="457200" rtl="0" eaLnBrk="1" latinLnBrk="0" hangingPunct="1">
+      <a:lvl4pPr marL="1371600" algn="l" defTabSz="914400" rtl="0" eaLnBrk="1" latinLnBrk="0" hangingPunct="1">
         <a:defRPr sz="1800" kern="1200">
           <a:solidFill>
             <a:schemeClr val="tx1"/>
@@ -3021,7 +3246,7 @@
           <a:cs typeface="+mn-cs"/>
         </a:defRPr>
       </a:lvl4pPr>
-      <a:lvl5pPr marL="1828800" algn="l" defTabSz="457200" rtl="0" eaLnBrk="1" latinLnBrk="0" hangingPunct="1">
+      <a:lvl5pPr marL="1828800" algn="l" defTabSz="914400" rtl="0" eaLnBrk="1" latinLnBrk="0" hangingPunct="1">
         <a:defRPr sz="1800" kern="1200">
           <a:solidFill>
             <a:schemeClr val="tx1"/>
@@ -3031,7 +3256,7 @@
           <a:cs typeface="+mn-cs"/>
         </a:defRPr>
       </a:lvl5pPr>
-      <a:lvl6pPr marL="2286000" algn="l" defTabSz="457200" rtl="0" eaLnBrk="1" latinLnBrk="0" hangingPunct="1">
+      <a:lvl6pPr marL="2286000" algn="l" defTabSz="914400" rtl="0" eaLnBrk="1" latinLnBrk="0" hangingPunct="1">
         <a:defRPr sz="1800" kern="1200">
           <a:solidFill>
             <a:schemeClr val="tx1"/>
@@ -3041,7 +3266,7 @@
           <a:cs typeface="+mn-cs"/>
         </a:defRPr>
       </a:lvl6pPr>
-      <a:lvl7pPr marL="2743200" algn="l" defTabSz="457200" rtl="0" eaLnBrk="1" latinLnBrk="0" hangingPunct="1">
+      <a:lvl7pPr marL="2743200" algn="l" defTabSz="914400" rtl="0" eaLnBrk="1" latinLnBrk="0" hangingPunct="1">
         <a:defRPr sz="1800" kern="1200">
           <a:solidFill>
             <a:schemeClr val="tx1"/>
@@ -3051,7 +3276,7 @@
           <a:cs typeface="+mn-cs"/>
         </a:defRPr>
       </a:lvl7pPr>
-      <a:lvl8pPr marL="3200400" algn="l" defTabSz="457200" rtl="0" eaLnBrk="1" latinLnBrk="0" hangingPunct="1">
+      <a:lvl8pPr marL="3200400" algn="l" defTabSz="914400" rtl="0" eaLnBrk="1" latinLnBrk="0" hangingPunct="1">
         <a:defRPr sz="1800" kern="1200">
           <a:solidFill>
             <a:schemeClr val="tx1"/>
@@ -3061,7 +3286,7 @@
           <a:cs typeface="+mn-cs"/>
         </a:defRPr>
       </a:lvl8pPr>
-      <a:lvl9pPr marL="3657600" algn="l" defTabSz="457200" rtl="0" eaLnBrk="1" latinLnBrk="0" hangingPunct="1">
+      <a:lvl9pPr marL="3657600" algn="l" defTabSz="914400" rtl="0" eaLnBrk="1" latinLnBrk="0" hangingPunct="1">
         <a:defRPr sz="1800" kern="1200">
           <a:solidFill>
             <a:schemeClr val="tx1"/>
@@ -3087,44 +3312,44 @@
         <a:sysClr val="window" lastClr="FFFFFF"/>
       </a:lt1>
       <a:dk2>
-        <a:srgbClr val="1F497D"/>
+        <a:srgbClr val="0E2841"/>
       </a:dk2>
       <a:lt2>
-        <a:srgbClr val="EEECE1"/>
+        <a:srgbClr val="E8E8E8"/>
       </a:lt2>
       <a:accent1>
-        <a:srgbClr val="4F81BD"/>
+        <a:srgbClr val="156082"/>
       </a:accent1>
       <a:accent2>
-        <a:srgbClr val="C0504D"/>
+        <a:srgbClr val="E97132"/>
       </a:accent2>
       <a:accent3>
-        <a:srgbClr val="9BBB59"/>
+        <a:srgbClr val="196B24"/>
       </a:accent3>
       <a:accent4>
-        <a:srgbClr val="8064A2"/>
+        <a:srgbClr val="0F9ED5"/>
       </a:accent4>
       <a:accent5>
-        <a:srgbClr val="4BACC6"/>
+        <a:srgbClr val="A02B93"/>
       </a:accent5>
       <a:accent6>
-        <a:srgbClr val="F79646"/>
+        <a:srgbClr val="4EA72E"/>
       </a:accent6>
       <a:hlink>
-        <a:srgbClr val="0000FF"/>
+        <a:srgbClr val="467886"/>
       </a:hlink>
       <a:folHlink>
-        <a:srgbClr val="800080"/>
+        <a:srgbClr val="96607D"/>
       </a:folHlink>
     </a:clrScheme>
     <a:fontScheme name="Office">
       <a:majorFont>
-        <a:latin typeface="Calibri"/>
+        <a:latin typeface="Aptos Display" panose="02110004020202020204"/>
         <a:ea typeface=""/>
         <a:cs typeface=""/>
-        <a:font script="Jpan" typeface="ＭＳ Ｐゴシック"/>
+        <a:font script="Jpan" typeface="游ゴシック Light"/>
         <a:font script="Hang" typeface="맑은 고딕"/>
-        <a:font script="Hans" typeface="宋体"/>
+        <a:font script="Hans" typeface="等线 Light"/>
         <a:font script="Hant" typeface="新細明體"/>
         <a:font script="Arab" typeface="Times New Roman"/>
         <a:font script="Hebr" typeface="Times New Roman"/>
@@ -3152,14 +3377,31 @@
         <a:font script="Viet" typeface="Times New Roman"/>
         <a:font script="Uigh" typeface="Microsoft Uighur"/>
         <a:font script="Geor" typeface="Sylfaen"/>
+        <a:font script="Armn" typeface="Arial"/>
+        <a:font script="Bugi" typeface="Leelawadee UI"/>
+        <a:font script="Bopo" typeface="Microsoft JhengHei"/>
+        <a:font script="Java" typeface="Javanese Text"/>
+        <a:font script="Lisu" typeface="Segoe UI"/>
+        <a:font script="Mymr" typeface="Myanmar Text"/>
+        <a:font script="Nkoo" typeface="Ebrima"/>
+        <a:font script="Olck" typeface="Nirmala UI"/>
+        <a:font script="Osma" typeface="Ebrima"/>
+        <a:font script="Phag" typeface="Phagspa"/>
+        <a:font script="Syrn" typeface="Estrangelo Edessa"/>
+        <a:font script="Syrj" typeface="Estrangelo Edessa"/>
+        <a:font script="Syre" typeface="Estrangelo Edessa"/>
+        <a:font script="Sora" typeface="Nirmala UI"/>
+        <a:font script="Tale" typeface="Microsoft Tai Le"/>
+        <a:font script="Talu" typeface="Microsoft New Tai Lue"/>
+        <a:font script="Tfng" typeface="Ebrima"/>
       </a:majorFont>
       <a:minorFont>
-        <a:latin typeface="Calibri"/>
+        <a:latin typeface="Aptos" panose="02110004020202020204"/>
         <a:ea typeface=""/>
         <a:cs typeface=""/>
-        <a:font script="Jpan" typeface="ＭＳ Ｐゴシック"/>
+        <a:font script="Jpan" typeface="游ゴシック"/>
         <a:font script="Hang" typeface="맑은 고딕"/>
-        <a:font script="Hans" typeface="宋体"/>
+        <a:font script="Hans" typeface="等线"/>
         <a:font script="Hant" typeface="新細明體"/>
         <a:font script="Arab" typeface="Arial"/>
         <a:font script="Hebr" typeface="Arial"/>
@@ -3187,6 +3429,23 @@
         <a:font script="Viet" typeface="Arial"/>
         <a:font script="Uigh" typeface="Microsoft Uighur"/>
         <a:font script="Geor" typeface="Sylfaen"/>
+        <a:font script="Armn" typeface="Arial"/>
+        <a:font script="Bugi" typeface="Leelawadee UI"/>
+        <a:font script="Bopo" typeface="Microsoft JhengHei"/>
+        <a:font script="Java" typeface="Javanese Text"/>
+        <a:font script="Lisu" typeface="Segoe UI"/>
+        <a:font script="Mymr" typeface="Myanmar Text"/>
+        <a:font script="Nkoo" typeface="Ebrima"/>
+        <a:font script="Olck" typeface="Nirmala UI"/>
+        <a:font script="Osma" typeface="Ebrima"/>
+        <a:font script="Phag" typeface="Phagspa"/>
+        <a:font script="Syrn" typeface="Estrangelo Edessa"/>
+        <a:font script="Syrj" typeface="Estrangelo Edessa"/>
+        <a:font script="Syre" typeface="Estrangelo Edessa"/>
+        <a:font script="Sora" typeface="Nirmala UI"/>
+        <a:font script="Tale" typeface="Microsoft Tai Le"/>
+        <a:font script="Talu" typeface="Microsoft New Tai Lue"/>
+        <a:font script="Tfng" typeface="Ebrima"/>
       </a:minorFont>
     </a:fontScheme>
     <a:fmtScheme name="Office">
@@ -3198,180 +3457,136 @@
           <a:gsLst>
             <a:gs pos="0">
               <a:schemeClr val="phClr">
-                <a:tint val="50000"/>
-                <a:satMod val="300000"/>
+                <a:lumMod val="110000"/>
+                <a:satMod val="105000"/>
+                <a:tint val="67000"/>
               </a:schemeClr>
             </a:gs>
-            <a:gs pos="35000">
+            <a:gs pos="50000">
               <a:schemeClr val="phClr">
-                <a:tint val="37000"/>
-                <a:satMod val="300000"/>
+                <a:lumMod val="105000"/>
+                <a:satMod val="103000"/>
+                <a:tint val="73000"/>
               </a:schemeClr>
             </a:gs>
             <a:gs pos="100000">
               <a:schemeClr val="phClr">
-                <a:tint val="15000"/>
-                <a:satMod val="350000"/>
+                <a:lumMod val="105000"/>
+                <a:satMod val="109000"/>
+                <a:tint val="81000"/>
               </a:schemeClr>
             </a:gs>
           </a:gsLst>
-          <a:lin ang="16200000" scaled="1"/>
+          <a:lin ang="5400000" scaled="0"/>
         </a:gradFill>
         <a:gradFill rotWithShape="1">
           <a:gsLst>
             <a:gs pos="0">
               <a:schemeClr val="phClr">
-                <a:tint val="100000"/>
+                <a:satMod val="103000"/>
+                <a:lumMod val="102000"/>
+                <a:tint val="94000"/>
+              </a:schemeClr>
+            </a:gs>
+            <a:gs pos="50000">
+              <a:schemeClr val="phClr">
+                <a:satMod val="110000"/>
+                <a:lumMod val="100000"/>
                 <a:shade val="100000"/>
-                <a:satMod val="130000"/>
               </a:schemeClr>
             </a:gs>
             <a:gs pos="100000">
               <a:schemeClr val="phClr">
-                <a:tint val="50000"/>
-                <a:shade val="100000"/>
-                <a:satMod val="350000"/>
+                <a:lumMod val="99000"/>
+                <a:satMod val="120000"/>
+                <a:shade val="78000"/>
               </a:schemeClr>
             </a:gs>
           </a:gsLst>
-          <a:lin ang="16200000" scaled="0"/>
+          <a:lin ang="5400000" scaled="0"/>
         </a:gradFill>
       </a:fillStyleLst>
       <a:lnStyleLst>
-        <a:ln w="9525" cap="flat" cmpd="sng" algn="ctr">
+        <a:ln w="12700" cap="flat" cmpd="sng" algn="ctr">
           <a:solidFill>
-            <a:schemeClr val="phClr">
-              <a:shade val="95000"/>
-              <a:satMod val="105000"/>
-            </a:schemeClr>
+            <a:schemeClr val="phClr"/>
           </a:solidFill>
           <a:prstDash val="solid"/>
+          <a:miter lim="800000"/>
+        </a:ln>
+        <a:ln w="19050" cap="flat" cmpd="sng" algn="ctr">
+          <a:solidFill>
+            <a:schemeClr val="phClr"/>
+          </a:solidFill>
+          <a:prstDash val="solid"/>
+          <a:miter lim="800000"/>
         </a:ln>
         <a:ln w="25400" cap="flat" cmpd="sng" algn="ctr">
           <a:solidFill>
             <a:schemeClr val="phClr"/>
           </a:solidFill>
           <a:prstDash val="solid"/>
-        </a:ln>
-        <a:ln w="38100" cap="flat" cmpd="sng" algn="ctr">
-          <a:solidFill>
-            <a:schemeClr val="phClr"/>
-          </a:solidFill>
-          <a:prstDash val="solid"/>
+          <a:miter lim="800000"/>
         </a:ln>
       </a:lnStyleLst>
       <a:effectStyleLst>
         <a:effectStyle>
+          <a:effectLst/>
+        </a:effectStyle>
+        <a:effectStyle>
+          <a:effectLst/>
+        </a:effectStyle>
+        <a:effectStyle>
           <a:effectLst>
-            <a:outerShdw blurRad="40000" dist="20000" dir="5400000" rotWithShape="0">
+            <a:outerShdw blurRad="57150" dist="19050" dir="5400000" algn="ctr" rotWithShape="0">
               <a:srgbClr val="000000">
-                <a:alpha val="38000"/>
+                <a:alpha val="63000"/>
               </a:srgbClr>
             </a:outerShdw>
           </a:effectLst>
-        </a:effectStyle>
-        <a:effectStyle>
-          <a:effectLst>
-            <a:outerShdw blurRad="40000" dist="23000" dir="5400000" rotWithShape="0">
-              <a:srgbClr val="000000">
-                <a:alpha val="35000"/>
-              </a:srgbClr>
-            </a:outerShdw>
-          </a:effectLst>
-        </a:effectStyle>
-        <a:effectStyle>
-          <a:effectLst>
-            <a:outerShdw blurRad="40000" dist="23000" dir="5400000" rotWithShape="0">
-              <a:srgbClr val="000000">
-                <a:alpha val="35000"/>
-              </a:srgbClr>
-            </a:outerShdw>
-          </a:effectLst>
-          <a:scene3d>
-            <a:camera prst="orthographicFront">
-              <a:rot lat="0" lon="0" rev="0"/>
-            </a:camera>
-            <a:lightRig rig="threePt" dir="t">
-              <a:rot lat="0" lon="0" rev="1200000"/>
-            </a:lightRig>
-          </a:scene3d>
-          <a:sp3d>
-            <a:bevelT w="63500" h="25400"/>
-          </a:sp3d>
         </a:effectStyle>
       </a:effectStyleLst>
       <a:bgFillStyleLst>
         <a:solidFill>
           <a:schemeClr val="phClr"/>
         </a:solidFill>
+        <a:solidFill>
+          <a:schemeClr val="phClr">
+            <a:tint val="95000"/>
+            <a:satMod val="170000"/>
+          </a:schemeClr>
+        </a:solidFill>
         <a:gradFill rotWithShape="1">
           <a:gsLst>
             <a:gs pos="0">
               <a:schemeClr val="phClr">
-                <a:tint val="40000"/>
-                <a:satMod val="350000"/>
+                <a:tint val="93000"/>
+                <a:satMod val="150000"/>
+                <a:shade val="98000"/>
+                <a:lumMod val="102000"/>
               </a:schemeClr>
             </a:gs>
-            <a:gs pos="40000">
+            <a:gs pos="50000">
               <a:schemeClr val="phClr">
-                <a:tint val="45000"/>
-                <a:shade val="99000"/>
-                <a:satMod val="350000"/>
+                <a:tint val="98000"/>
+                <a:satMod val="130000"/>
+                <a:shade val="90000"/>
+                <a:lumMod val="103000"/>
               </a:schemeClr>
             </a:gs>
             <a:gs pos="100000">
               <a:schemeClr val="phClr">
-                <a:shade val="20000"/>
-                <a:satMod val="255000"/>
+                <a:shade val="63000"/>
+                <a:satMod val="120000"/>
               </a:schemeClr>
             </a:gs>
           </a:gsLst>
-          <a:path path="circle">
-            <a:fillToRect l="50000" t="-80000" r="50000" b="180000"/>
-          </a:path>
-        </a:gradFill>
-        <a:gradFill rotWithShape="1">
-          <a:gsLst>
-            <a:gs pos="0">
-              <a:schemeClr val="phClr">
-                <a:tint val="80000"/>
-                <a:satMod val="300000"/>
-              </a:schemeClr>
-            </a:gs>
-            <a:gs pos="100000">
-              <a:schemeClr val="phClr">
-                <a:shade val="30000"/>
-                <a:satMod val="200000"/>
-              </a:schemeClr>
-            </a:gs>
-          </a:gsLst>
-          <a:path path="circle">
-            <a:fillToRect l="50000" t="50000" r="50000" b="50000"/>
-          </a:path>
+          <a:lin ang="5400000" scaled="0"/>
         </a:gradFill>
       </a:bgFillStyleLst>
     </a:fmtScheme>
   </a:themeElements>
   <a:objectDefaults>
-    <a:spDef>
-      <a:spPr/>
-      <a:bodyPr/>
-      <a:lstStyle/>
-      <a:style>
-        <a:lnRef idx="1">
-          <a:schemeClr val="accent1"/>
-        </a:lnRef>
-        <a:fillRef idx="3">
-          <a:schemeClr val="accent1"/>
-        </a:fillRef>
-        <a:effectRef idx="2">
-          <a:schemeClr val="accent1"/>
-        </a:effectRef>
-        <a:fontRef idx="minor">
-          <a:schemeClr val="lt1"/>
-        </a:fontRef>
-      </a:style>
-    </a:spDef>
     <a:lnDef>
       <a:spPr/>
       <a:bodyPr/>
@@ -3393,5 +3608,10 @@
     </a:lnDef>
   </a:objectDefaults>
   <a:extraClrSchemeLst/>
+  <a:extLst>
+    <a:ext uri="{05A4C25C-085E-4340-85A3-A5531E510DB2}">
+      <thm15:themeFamily xmlns:thm15="http://schemas.microsoft.com/office/thememl/2012/main" name="Office Theme" id="{2E142A2C-CD16-42D6-873A-C26D2A0506FA}" vid="{1BDDFF52-6CD6-40A5-AB3C-68EB2F1E4D0A}"/>
+    </a:ext>
+  </a:extLst>
 </a:theme>
 </file>